--- a/採用管理システム.pptx
+++ b/採用管理システム.pptx
@@ -344,7 +344,7 @@
           <a:p>
             <a:fld id="{8DC4806F-8A57-40BE-A78D-79608F060769}" type="datetimeFigureOut">
               <a:rPr kumimoji="1" lang="ja-JP" altLang="en-US" smtClean="0"/>
-              <a:t>2026/10/7</a:t>
+              <a:t>2026/10/15</a:t>
             </a:fld>
             <a:endParaRPr kumimoji="1" lang="ja-JP" altLang="en-US"/>
           </a:p>
@@ -691,7 +691,7 @@
           <a:p>
             <a:fld id="{8DC4806F-8A57-40BE-A78D-79608F060769}" type="datetimeFigureOut">
               <a:rPr kumimoji="1" lang="ja-JP" altLang="en-US" smtClean="0"/>
-              <a:t>2026/10/7</a:t>
+              <a:t>2026/10/15</a:t>
             </a:fld>
             <a:endParaRPr kumimoji="1" lang="ja-JP" altLang="en-US"/>
           </a:p>
@@ -1037,7 +1037,7 @@
           <a:p>
             <a:fld id="{8DC4806F-8A57-40BE-A78D-79608F060769}" type="datetimeFigureOut">
               <a:rPr kumimoji="1" lang="ja-JP" altLang="en-US" smtClean="0"/>
-              <a:t>2026/10/7</a:t>
+              <a:t>2026/10/15</a:t>
             </a:fld>
             <a:endParaRPr kumimoji="1" lang="ja-JP" altLang="en-US"/>
           </a:p>
@@ -1332,7 +1332,7 @@
           <a:p>
             <a:fld id="{8DC4806F-8A57-40BE-A78D-79608F060769}" type="datetimeFigureOut">
               <a:rPr kumimoji="1" lang="ja-JP" altLang="en-US" smtClean="0"/>
-              <a:t>2026/10/7</a:t>
+              <a:t>2026/10/15</a:t>
             </a:fld>
             <a:endParaRPr kumimoji="1" lang="ja-JP" altLang="en-US"/>
           </a:p>
@@ -1683,7 +1683,7 @@
           <a:p>
             <a:fld id="{8DC4806F-8A57-40BE-A78D-79608F060769}" type="datetimeFigureOut">
               <a:rPr kumimoji="1" lang="ja-JP" altLang="en-US" smtClean="0"/>
-              <a:t>2026/10/7</a:t>
+              <a:t>2026/10/15</a:t>
             </a:fld>
             <a:endParaRPr kumimoji="1" lang="ja-JP" altLang="en-US"/>
           </a:p>
@@ -2036,7 +2036,7 @@
           <a:p>
             <a:fld id="{8DC4806F-8A57-40BE-A78D-79608F060769}" type="datetimeFigureOut">
               <a:rPr kumimoji="1" lang="ja-JP" altLang="en-US" smtClean="0"/>
-              <a:t>2026/10/7</a:t>
+              <a:t>2026/10/15</a:t>
             </a:fld>
             <a:endParaRPr kumimoji="1" lang="ja-JP" altLang="en-US"/>
           </a:p>
@@ -2377,7 +2377,7 @@
           <a:p>
             <a:fld id="{8DC4806F-8A57-40BE-A78D-79608F060769}" type="datetimeFigureOut">
               <a:rPr kumimoji="1" lang="ja-JP" altLang="en-US" smtClean="0"/>
-              <a:t>2026/10/7</a:t>
+              <a:t>2026/10/15</a:t>
             </a:fld>
             <a:endParaRPr kumimoji="1" lang="ja-JP" altLang="en-US"/>
           </a:p>
@@ -2948,7 +2948,7 @@
           <a:p>
             <a:fld id="{8DC4806F-8A57-40BE-A78D-79608F060769}" type="datetimeFigureOut">
               <a:rPr kumimoji="1" lang="ja-JP" altLang="en-US" smtClean="0"/>
-              <a:t>2026/10/7</a:t>
+              <a:t>2026/10/15</a:t>
             </a:fld>
             <a:endParaRPr kumimoji="1" lang="ja-JP" altLang="en-US"/>
           </a:p>
@@ -3193,7 +3193,7 @@
           <a:p>
             <a:fld id="{8DC4806F-8A57-40BE-A78D-79608F060769}" type="datetimeFigureOut">
               <a:rPr kumimoji="1" lang="ja-JP" altLang="en-US" smtClean="0"/>
-              <a:t>2026/10/7</a:t>
+              <a:t>2026/10/15</a:t>
             </a:fld>
             <a:endParaRPr kumimoji="1" lang="ja-JP" altLang="en-US"/>
           </a:p>
@@ -3584,7 +3584,7 @@
           <a:p>
             <a:fld id="{8DC4806F-8A57-40BE-A78D-79608F060769}" type="datetimeFigureOut">
               <a:rPr kumimoji="1" lang="ja-JP" altLang="en-US" smtClean="0"/>
-              <a:t>2026/10/7</a:t>
+              <a:t>2026/10/15</a:t>
             </a:fld>
             <a:endParaRPr kumimoji="1" lang="ja-JP" altLang="en-US"/>
           </a:p>
@@ -4108,7 +4108,7 @@
           <a:p>
             <a:fld id="{8DC4806F-8A57-40BE-A78D-79608F060769}" type="datetimeFigureOut">
               <a:rPr kumimoji="1" lang="ja-JP" altLang="en-US" smtClean="0"/>
-              <a:t>2026/10/7</a:t>
+              <a:t>2026/10/15</a:t>
             </a:fld>
             <a:endParaRPr kumimoji="1" lang="ja-JP" altLang="en-US"/>
           </a:p>
@@ -4416,7 +4416,7 @@
           <a:p>
             <a:fld id="{8DC4806F-8A57-40BE-A78D-79608F060769}" type="datetimeFigureOut">
               <a:rPr kumimoji="1" lang="ja-JP" altLang="en-US" smtClean="0"/>
-              <a:t>2026/10/7</a:t>
+              <a:t>2026/10/15</a:t>
             </a:fld>
             <a:endParaRPr kumimoji="1" lang="ja-JP" altLang="en-US"/>
           </a:p>
@@ -4751,7 +4751,7 @@
           <a:p>
             <a:fld id="{8DC4806F-8A57-40BE-A78D-79608F060769}" type="datetimeFigureOut">
               <a:rPr kumimoji="1" lang="ja-JP" altLang="en-US" smtClean="0"/>
-              <a:t>2026/10/7</a:t>
+              <a:t>2026/10/15</a:t>
             </a:fld>
             <a:endParaRPr kumimoji="1" lang="ja-JP" altLang="en-US"/>
           </a:p>
@@ -5096,7 +5096,7 @@
           <a:p>
             <a:fld id="{8DC4806F-8A57-40BE-A78D-79608F060769}" type="datetimeFigureOut">
               <a:rPr kumimoji="1" lang="ja-JP" altLang="en-US" smtClean="0"/>
-              <a:t>2026/10/7</a:t>
+              <a:t>2026/10/15</a:t>
             </a:fld>
             <a:endParaRPr kumimoji="1" lang="ja-JP" altLang="en-US"/>
           </a:p>
@@ -5349,7 +5349,7 @@
           <a:p>
             <a:fld id="{8DC4806F-8A57-40BE-A78D-79608F060769}" type="datetimeFigureOut">
               <a:rPr kumimoji="1" lang="ja-JP" altLang="en-US" smtClean="0"/>
-              <a:t>2026/10/7</a:t>
+              <a:t>2026/10/15</a:t>
             </a:fld>
             <a:endParaRPr kumimoji="1" lang="ja-JP" altLang="en-US"/>
           </a:p>
@@ -5736,7 +5736,7 @@
           <a:p>
             <a:fld id="{8DC4806F-8A57-40BE-A78D-79608F060769}" type="datetimeFigureOut">
               <a:rPr kumimoji="1" lang="ja-JP" altLang="en-US" smtClean="0"/>
-              <a:t>2026/10/7</a:t>
+              <a:t>2026/10/15</a:t>
             </a:fld>
             <a:endParaRPr kumimoji="1" lang="ja-JP" altLang="en-US"/>
           </a:p>
@@ -6264,7 +6264,7 @@
           <a:p>
             <a:fld id="{8DC4806F-8A57-40BE-A78D-79608F060769}" type="datetimeFigureOut">
               <a:rPr kumimoji="1" lang="ja-JP" altLang="en-US" smtClean="0"/>
-              <a:t>2026/10/7</a:t>
+              <a:t>2026/10/15</a:t>
             </a:fld>
             <a:endParaRPr kumimoji="1" lang="ja-JP" altLang="en-US"/>
           </a:p>
@@ -6377,7 +6377,7 @@
           <a:p>
             <a:fld id="{8DC4806F-8A57-40BE-A78D-79608F060769}" type="datetimeFigureOut">
               <a:rPr kumimoji="1" lang="ja-JP" altLang="en-US" smtClean="0"/>
-              <a:t>2026/10/7</a:t>
+              <a:t>2026/10/15</a:t>
             </a:fld>
             <a:endParaRPr kumimoji="1" lang="ja-JP" altLang="en-US"/>
           </a:p>
@@ -6610,7 +6610,7 @@
           <a:p>
             <a:fld id="{8DC4806F-8A57-40BE-A78D-79608F060769}" type="datetimeFigureOut">
               <a:rPr kumimoji="1" lang="ja-JP" altLang="en-US" smtClean="0"/>
-              <a:t>2026/10/7</a:t>
+              <a:t>2026/10/15</a:t>
             </a:fld>
             <a:endParaRPr kumimoji="1" lang="ja-JP" altLang="en-US"/>
           </a:p>
@@ -7044,7 +7044,7 @@
           <a:p>
             <a:fld id="{8DC4806F-8A57-40BE-A78D-79608F060769}" type="datetimeFigureOut">
               <a:rPr kumimoji="1" lang="ja-JP" altLang="en-US" smtClean="0"/>
-              <a:t>2026/10/7</a:t>
+              <a:t>2026/10/15</a:t>
             </a:fld>
             <a:endParaRPr kumimoji="1" lang="ja-JP" altLang="en-US"/>
           </a:p>
@@ -7364,7 +7364,7 @@
           <a:p>
             <a:fld id="{8DC4806F-8A57-40BE-A78D-79608F060769}" type="datetimeFigureOut">
               <a:rPr kumimoji="1" lang="ja-JP" altLang="en-US" smtClean="0"/>
-              <a:t>2026/10/7</a:t>
+              <a:t>2026/10/15</a:t>
             </a:fld>
             <a:endParaRPr kumimoji="1" lang="ja-JP" altLang="en-US"/>
           </a:p>
@@ -7665,7 +7665,7 @@
           <a:p>
             <a:fld id="{8DC4806F-8A57-40BE-A78D-79608F060769}" type="datetimeFigureOut">
               <a:rPr kumimoji="1" lang="ja-JP" altLang="en-US" smtClean="0"/>
-              <a:t>2026/10/7</a:t>
+              <a:t>2026/10/15</a:t>
             </a:fld>
             <a:endParaRPr kumimoji="1" lang="ja-JP" altLang="en-US"/>
           </a:p>
@@ -7953,7 +7953,7 @@
           <a:p>
             <a:fld id="{8DC4806F-8A57-40BE-A78D-79608F060769}" type="datetimeFigureOut">
               <a:rPr kumimoji="1" lang="ja-JP" altLang="en-US" smtClean="0"/>
-              <a:t>2026/10/7</a:t>
+              <a:t>2026/10/15</a:t>
             </a:fld>
             <a:endParaRPr kumimoji="1" lang="ja-JP" altLang="en-US"/>
           </a:p>
@@ -8300,7 +8300,7 @@
           <a:p>
             <a:fld id="{8DC4806F-8A57-40BE-A78D-79608F060769}" type="datetimeFigureOut">
               <a:rPr kumimoji="1" lang="ja-JP" altLang="en-US" smtClean="0"/>
-              <a:t>2026/10/7</a:t>
+              <a:t>2026/10/15</a:t>
             </a:fld>
             <a:endParaRPr kumimoji="1" lang="ja-JP" altLang="en-US"/>
           </a:p>
@@ -8733,7 +8733,7 @@
           <a:p>
             <a:fld id="{8DC4806F-8A57-40BE-A78D-79608F060769}" type="datetimeFigureOut">
               <a:rPr kumimoji="1" lang="ja-JP" altLang="en-US" smtClean="0"/>
-              <a:t>2026/10/7</a:t>
+              <a:t>2026/10/15</a:t>
             </a:fld>
             <a:endParaRPr kumimoji="1" lang="ja-JP" altLang="en-US"/>
           </a:p>
@@ -9073,7 +9073,7 @@
           <a:p>
             <a:fld id="{8DC4806F-8A57-40BE-A78D-79608F060769}" type="datetimeFigureOut">
               <a:rPr kumimoji="1" lang="ja-JP" altLang="en-US" smtClean="0"/>
-              <a:t>2026/10/7</a:t>
+              <a:t>2026/10/15</a:t>
             </a:fld>
             <a:endParaRPr kumimoji="1" lang="ja-JP" altLang="en-US"/>
           </a:p>
@@ -9456,7 +9456,7 @@
           <a:p>
             <a:fld id="{8DC4806F-8A57-40BE-A78D-79608F060769}" type="datetimeFigureOut">
               <a:rPr kumimoji="1" lang="ja-JP" altLang="en-US" smtClean="0"/>
-              <a:t>2026/10/7</a:t>
+              <a:t>2026/10/15</a:t>
             </a:fld>
             <a:endParaRPr kumimoji="1" lang="ja-JP" altLang="en-US"/>
           </a:p>
@@ -9835,7 +9835,7 @@
           <a:p>
             <a:fld id="{8DC4806F-8A57-40BE-A78D-79608F060769}" type="datetimeFigureOut">
               <a:rPr kumimoji="1" lang="ja-JP" altLang="en-US" smtClean="0"/>
-              <a:t>2026/10/7</a:t>
+              <a:t>2026/10/15</a:t>
             </a:fld>
             <a:endParaRPr kumimoji="1" lang="ja-JP" altLang="en-US"/>
           </a:p>
@@ -10452,10 +10452,10 @@
       </p:grpSpPr>
       <p:pic>
         <p:nvPicPr>
-          <p:cNvPr id="6" name="図 5">
-            <a:extLst>
-              <a:ext uri="{FF2B5EF4-FFF2-40B4-BE49-F238E27FC236}">
-                <a16:creationId xmlns:a16="http://schemas.microsoft.com/office/drawing/2014/main" id="{BDCC805F-E465-5FA6-5808-7B4564CF1BE8}"/>
+          <p:cNvPr id="9" name="図 8" descr="メール パソコンのロイヤリティフリーイラスト素材 58,900点以上 - iStock">
+            <a:extLst>
+              <a:ext uri="{FF2B5EF4-FFF2-40B4-BE49-F238E27FC236}">
+                <a16:creationId xmlns:a16="http://schemas.microsoft.com/office/drawing/2014/main" id="{FE642934-F745-13A7-5AF7-291D17C73C0E}"/>
               </a:ext>
             </a:extLst>
           </p:cNvPr>
@@ -10471,44 +10471,385 @@
           </a:stretch>
         </p:blipFill>
         <p:spPr>
-          <a:xfrm>
-            <a:off x="359596" y="184934"/>
-            <a:ext cx="4508644" cy="6462445"/>
+          <a:xfrm rot="822810">
+            <a:off x="9988028" y="4905444"/>
+            <a:ext cx="1929255" cy="1654998"/>
           </a:xfrm>
           <a:prstGeom prst="rect">
             <a:avLst/>
           </a:prstGeom>
         </p:spPr>
       </p:pic>
-      <p:sp>
-        <p:nvSpPr>
-          <p:cNvPr id="4" name="吹き出し: 角を丸めた四角形 3">
-            <a:extLst>
-              <a:ext uri="{FF2B5EF4-FFF2-40B4-BE49-F238E27FC236}">
-                <a16:creationId xmlns:a16="http://schemas.microsoft.com/office/drawing/2014/main" id="{0C86B683-0AE3-6132-882B-DDD370982EB1}"/>
-              </a:ext>
-            </a:extLst>
-          </p:cNvPr>
-          <p:cNvSpPr/>
+      <p:grpSp>
+        <p:nvGrpSpPr>
+          <p:cNvPr id="2" name="グループ化 1">
+            <a:extLst>
+              <a:ext uri="{FF2B5EF4-FFF2-40B4-BE49-F238E27FC236}">
+                <a16:creationId xmlns:a16="http://schemas.microsoft.com/office/drawing/2014/main" id="{D47CFD6F-0DE6-AE3C-274C-D96488481DDC}"/>
+              </a:ext>
+            </a:extLst>
+          </p:cNvPr>
+          <p:cNvGrpSpPr/>
           <p:nvPr/>
-        </p:nvSpPr>
-        <p:spPr>
-          <a:xfrm>
-            <a:off x="5486399" y="164388"/>
-            <a:ext cx="6390527" cy="4448710"/>
-          </a:xfrm>
-          <a:prstGeom prst="wedgeRoundRectCallout">
-            <a:avLst>
-              <a:gd name="adj1" fmla="val -63811"/>
-              <a:gd name="adj2" fmla="val -10957"/>
-              <a:gd name="adj3" fmla="val 16667"/>
-            </a:avLst>
-          </a:prstGeom>
-          <a:noFill/>
-          <a:ln w="28575">
+        </p:nvGrpSpPr>
+        <p:grpSpPr>
+          <a:xfrm>
+            <a:off x="359596" y="164388"/>
+            <a:ext cx="11517330" cy="6482991"/>
+            <a:chOff x="359596" y="164388"/>
+            <a:chExt cx="11517330" cy="6482991"/>
+          </a:xfrm>
+        </p:grpSpPr>
+        <p:pic>
+          <p:nvPicPr>
+            <p:cNvPr id="6" name="図 5">
+              <a:extLst>
+                <a:ext uri="{FF2B5EF4-FFF2-40B4-BE49-F238E27FC236}">
+                  <a16:creationId xmlns:a16="http://schemas.microsoft.com/office/drawing/2014/main" id="{BDCC805F-E465-5FA6-5808-7B4564CF1BE8}"/>
+                </a:ext>
+              </a:extLst>
+            </p:cNvPr>
+            <p:cNvPicPr>
+              <a:picLocks noChangeAspect="1"/>
+            </p:cNvPicPr>
+            <p:nvPr/>
+          </p:nvPicPr>
+          <p:blipFill>
+            <a:blip r:embed="rId3"/>
+            <a:stretch>
+              <a:fillRect/>
+            </a:stretch>
+          </p:blipFill>
+          <p:spPr>
+            <a:xfrm>
+              <a:off x="359596" y="184934"/>
+              <a:ext cx="4508644" cy="6462445"/>
+            </a:xfrm>
+            <a:prstGeom prst="rect">
+              <a:avLst/>
+            </a:prstGeom>
+          </p:spPr>
+        </p:pic>
+        <p:sp>
+          <p:nvSpPr>
+            <p:cNvPr id="4" name="吹き出し: 角を丸めた四角形 3">
+              <a:extLst>
+                <a:ext uri="{FF2B5EF4-FFF2-40B4-BE49-F238E27FC236}">
+                  <a16:creationId xmlns:a16="http://schemas.microsoft.com/office/drawing/2014/main" id="{0C86B683-0AE3-6132-882B-DDD370982EB1}"/>
+                </a:ext>
+              </a:extLst>
+            </p:cNvPr>
+            <p:cNvSpPr/>
+            <p:nvPr/>
+          </p:nvSpPr>
+          <p:spPr>
+            <a:xfrm>
+              <a:off x="5486399" y="164388"/>
+              <a:ext cx="6390527" cy="4448710"/>
+            </a:xfrm>
+            <a:prstGeom prst="wedgeRoundRectCallout">
+              <a:avLst>
+                <a:gd name="adj1" fmla="val -63811"/>
+                <a:gd name="adj2" fmla="val -10957"/>
+                <a:gd name="adj3" fmla="val 16667"/>
+              </a:avLst>
+            </a:prstGeom>
+            <a:noFill/>
+            <a:ln w="28575">
+              <a:solidFill>
+                <a:srgbClr val="FFC000"/>
+              </a:solidFill>
+            </a:ln>
+          </p:spPr>
+          <p:style>
+            <a:lnRef idx="2">
+              <a:schemeClr val="accent1">
+                <a:shade val="15000"/>
+              </a:schemeClr>
+            </a:lnRef>
+            <a:fillRef idx="1">
+              <a:schemeClr val="accent1"/>
+            </a:fillRef>
+            <a:effectRef idx="0">
+              <a:schemeClr val="accent1"/>
+            </a:effectRef>
+            <a:fontRef idx="minor">
+              <a:schemeClr val="lt1"/>
+            </a:fontRef>
+          </p:style>
+          <p:txBody>
+            <a:bodyPr rtlCol="0" anchor="ctr"/>
+            <a:lstStyle/>
+            <a:p>
+              <a:r>
+                <a:rPr kumimoji="1" lang="ja-JP" altLang="en-US" sz="2800" dirty="0">
+                  <a:solidFill>
+                    <a:schemeClr val="tx1"/>
+                  </a:solidFill>
+                  <a:latin typeface="HGP創英角ﾎﾟｯﾌﾟ体" panose="040B0A00000000000000" pitchFamily="50" charset="-128"/>
+                  <a:ea typeface="HGP創英角ﾎﾟｯﾌﾟ体" panose="040B0A00000000000000" pitchFamily="50" charset="-128"/>
+                </a:rPr>
+                <a:t>応募者に</a:t>
+              </a:r>
+              <a:endParaRPr kumimoji="1" lang="en-US" altLang="ja-JP" sz="2800" dirty="0">
+                <a:solidFill>
+                  <a:schemeClr val="tx1"/>
+                </a:solidFill>
+                <a:latin typeface="HGP創英角ﾎﾟｯﾌﾟ体" panose="040B0A00000000000000" pitchFamily="50" charset="-128"/>
+                <a:ea typeface="HGP創英角ﾎﾟｯﾌﾟ体" panose="040B0A00000000000000" pitchFamily="50" charset="-128"/>
+              </a:endParaRPr>
+            </a:p>
+            <a:p>
+              <a:endParaRPr kumimoji="1" lang="en-US" altLang="ja-JP" sz="2800" dirty="0">
+                <a:solidFill>
+                  <a:schemeClr val="tx1"/>
+                </a:solidFill>
+                <a:latin typeface="HGP創英角ﾎﾟｯﾌﾟ体" panose="040B0A00000000000000" pitchFamily="50" charset="-128"/>
+                <a:ea typeface="HGP創英角ﾎﾟｯﾌﾟ体" panose="040B0A00000000000000" pitchFamily="50" charset="-128"/>
+              </a:endParaRPr>
+            </a:p>
+            <a:p>
+              <a:r>
+                <a:rPr kumimoji="1" lang="ja-JP" altLang="en-US" sz="2800" dirty="0">
+                  <a:solidFill>
+                    <a:schemeClr val="tx1"/>
+                  </a:solidFill>
+                  <a:latin typeface="HGP創英角ﾎﾟｯﾌﾟ体" panose="040B0A00000000000000" pitchFamily="50" charset="-128"/>
+                  <a:ea typeface="HGP創英角ﾎﾟｯﾌﾟ体" panose="040B0A00000000000000" pitchFamily="50" charset="-128"/>
+                </a:rPr>
+                <a:t>①名前　②カナ　③性別</a:t>
+              </a:r>
+              <a:endParaRPr kumimoji="1" lang="en-US" altLang="ja-JP" sz="2800" dirty="0">
+                <a:solidFill>
+                  <a:schemeClr val="tx1"/>
+                </a:solidFill>
+                <a:latin typeface="HGP創英角ﾎﾟｯﾌﾟ体" panose="040B0A00000000000000" pitchFamily="50" charset="-128"/>
+                <a:ea typeface="HGP創英角ﾎﾟｯﾌﾟ体" panose="040B0A00000000000000" pitchFamily="50" charset="-128"/>
+              </a:endParaRPr>
+            </a:p>
+            <a:p>
+              <a:r>
+                <a:rPr kumimoji="1" lang="ja-JP" altLang="en-US" sz="2800" dirty="0">
+                  <a:solidFill>
+                    <a:schemeClr val="tx1"/>
+                  </a:solidFill>
+                  <a:latin typeface="HGP創英角ﾎﾟｯﾌﾟ体" panose="040B0A00000000000000" pitchFamily="50" charset="-128"/>
+                  <a:ea typeface="HGP創英角ﾎﾟｯﾌﾟ体" panose="040B0A00000000000000" pitchFamily="50" charset="-128"/>
+                </a:rPr>
+                <a:t>④生年月日　⑤メールアドレス</a:t>
+              </a:r>
+              <a:endParaRPr kumimoji="1" lang="en-US" altLang="ja-JP" sz="2800" dirty="0">
+                <a:solidFill>
+                  <a:schemeClr val="tx1"/>
+                </a:solidFill>
+                <a:latin typeface="HGP創英角ﾎﾟｯﾌﾟ体" panose="040B0A00000000000000" pitchFamily="50" charset="-128"/>
+                <a:ea typeface="HGP創英角ﾎﾟｯﾌﾟ体" panose="040B0A00000000000000" pitchFamily="50" charset="-128"/>
+              </a:endParaRPr>
+            </a:p>
+            <a:p>
+              <a:r>
+                <a:rPr kumimoji="1" lang="ja-JP" altLang="en-US" sz="2800" dirty="0">
+                  <a:solidFill>
+                    <a:schemeClr val="tx1"/>
+                  </a:solidFill>
+                  <a:latin typeface="HGP創英角ﾎﾟｯﾌﾟ体" panose="040B0A00000000000000" pitchFamily="50" charset="-128"/>
+                  <a:ea typeface="HGP創英角ﾎﾟｯﾌﾟ体" panose="040B0A00000000000000" pitchFamily="50" charset="-128"/>
+                </a:rPr>
+                <a:t>⑥電話番号　⑦郵便番号</a:t>
+              </a:r>
+              <a:endParaRPr kumimoji="1" lang="en-US" altLang="ja-JP" sz="2800" dirty="0">
+                <a:solidFill>
+                  <a:schemeClr val="tx1"/>
+                </a:solidFill>
+                <a:latin typeface="HGP創英角ﾎﾟｯﾌﾟ体" panose="040B0A00000000000000" pitchFamily="50" charset="-128"/>
+                <a:ea typeface="HGP創英角ﾎﾟｯﾌﾟ体" panose="040B0A00000000000000" pitchFamily="50" charset="-128"/>
+              </a:endParaRPr>
+            </a:p>
+            <a:p>
+              <a:r>
+                <a:rPr kumimoji="1" lang="ja-JP" altLang="en-US" sz="2800" dirty="0">
+                  <a:solidFill>
+                    <a:schemeClr val="tx1"/>
+                  </a:solidFill>
+                  <a:latin typeface="HGP創英角ﾎﾟｯﾌﾟ体" panose="040B0A00000000000000" pitchFamily="50" charset="-128"/>
+                  <a:ea typeface="HGP創英角ﾎﾟｯﾌﾟ体" panose="040B0A00000000000000" pitchFamily="50" charset="-128"/>
+                </a:rPr>
+                <a:t>⑧住所　⑨最終学歴　⑩希望勤務地</a:t>
+              </a:r>
+              <a:endParaRPr kumimoji="1" lang="en-US" altLang="ja-JP" sz="2800" dirty="0">
+                <a:solidFill>
+                  <a:schemeClr val="tx1"/>
+                </a:solidFill>
+                <a:latin typeface="HGP創英角ﾎﾟｯﾌﾟ体" panose="040B0A00000000000000" pitchFamily="50" charset="-128"/>
+                <a:ea typeface="HGP創英角ﾎﾟｯﾌﾟ体" panose="040B0A00000000000000" pitchFamily="50" charset="-128"/>
+              </a:endParaRPr>
+            </a:p>
+            <a:p>
+              <a:endParaRPr kumimoji="1" lang="en-US" altLang="ja-JP" sz="2800" dirty="0">
+                <a:solidFill>
+                  <a:schemeClr val="tx1"/>
+                </a:solidFill>
+                <a:latin typeface="HGP創英角ﾎﾟｯﾌﾟ体" panose="040B0A00000000000000" pitchFamily="50" charset="-128"/>
+                <a:ea typeface="HGP創英角ﾎﾟｯﾌﾟ体" panose="040B0A00000000000000" pitchFamily="50" charset="-128"/>
+              </a:endParaRPr>
+            </a:p>
+            <a:p>
+              <a:pPr algn="r"/>
+              <a:r>
+                <a:rPr kumimoji="1" lang="ja-JP" altLang="en-US" sz="2800" dirty="0">
+                  <a:solidFill>
+                    <a:schemeClr val="tx1"/>
+                  </a:solidFill>
+                  <a:latin typeface="HGP創英角ﾎﾟｯﾌﾟ体" panose="040B0A00000000000000" pitchFamily="50" charset="-128"/>
+                  <a:ea typeface="HGP創英角ﾎﾟｯﾌﾟ体" panose="040B0A00000000000000" pitchFamily="50" charset="-128"/>
+                </a:rPr>
+                <a:t>を入力してもらう！</a:t>
+              </a:r>
+              <a:endParaRPr kumimoji="1" lang="ja-JP" altLang="en-US" dirty="0"/>
+            </a:p>
+          </p:txBody>
+        </p:sp>
+        <p:sp>
+          <p:nvSpPr>
+            <p:cNvPr id="7" name="矢印: 下 6">
+              <a:extLst>
+                <a:ext uri="{FF2B5EF4-FFF2-40B4-BE49-F238E27FC236}">
+                  <a16:creationId xmlns:a16="http://schemas.microsoft.com/office/drawing/2014/main" id="{92E266E8-2BB1-0B6E-32EB-84EC18BBDFEE}"/>
+                </a:ext>
+              </a:extLst>
+            </p:cNvPr>
+            <p:cNvSpPr/>
+            <p:nvPr/>
+          </p:nvSpPr>
+          <p:spPr>
+            <a:xfrm>
+              <a:off x="8003569" y="4479533"/>
+              <a:ext cx="1284270" cy="832207"/>
+            </a:xfrm>
+            <a:prstGeom prst="downArrow">
+              <a:avLst/>
+            </a:prstGeom>
             <a:solidFill>
               <a:srgbClr val="FFC000"/>
             </a:solidFill>
+            <a:ln>
+              <a:solidFill>
+                <a:srgbClr val="FFC000"/>
+              </a:solidFill>
+            </a:ln>
+          </p:spPr>
+          <p:style>
+            <a:lnRef idx="2">
+              <a:schemeClr val="accent1">
+                <a:shade val="15000"/>
+              </a:schemeClr>
+            </a:lnRef>
+            <a:fillRef idx="1">
+              <a:schemeClr val="accent1"/>
+            </a:fillRef>
+            <a:effectRef idx="0">
+              <a:schemeClr val="accent1"/>
+            </a:effectRef>
+            <a:fontRef idx="minor">
+              <a:schemeClr val="lt1"/>
+            </a:fontRef>
+          </p:style>
+          <p:txBody>
+            <a:bodyPr rtlCol="0" anchor="ctr"/>
+            <a:lstStyle/>
+            <a:p>
+              <a:pPr algn="ctr"/>
+              <a:endParaRPr kumimoji="1" lang="ja-JP" altLang="en-US"/>
+            </a:p>
+          </p:txBody>
+        </p:sp>
+        <p:sp>
+          <p:nvSpPr>
+            <p:cNvPr id="8" name="正方形/長方形 7">
+              <a:extLst>
+                <a:ext uri="{FF2B5EF4-FFF2-40B4-BE49-F238E27FC236}">
+                  <a16:creationId xmlns:a16="http://schemas.microsoft.com/office/drawing/2014/main" id="{727CFADC-76E5-2933-FDC8-805DA90652B1}"/>
+                </a:ext>
+              </a:extLst>
+            </p:cNvPr>
+            <p:cNvSpPr/>
+            <p:nvPr/>
+          </p:nvSpPr>
+          <p:spPr>
+            <a:xfrm>
+              <a:off x="4722687" y="5311741"/>
+              <a:ext cx="6667928" cy="1263721"/>
+            </a:xfrm>
+            <a:prstGeom prst="rect">
+              <a:avLst/>
+            </a:prstGeom>
+            <a:noFill/>
+            <a:ln>
+              <a:noFill/>
+            </a:ln>
+          </p:spPr>
+          <p:style>
+            <a:lnRef idx="2">
+              <a:schemeClr val="accent1">
+                <a:shade val="15000"/>
+              </a:schemeClr>
+            </a:lnRef>
+            <a:fillRef idx="1">
+              <a:schemeClr val="accent1"/>
+            </a:fillRef>
+            <a:effectRef idx="0">
+              <a:schemeClr val="accent1"/>
+            </a:effectRef>
+            <a:fontRef idx="minor">
+              <a:schemeClr val="lt1"/>
+            </a:fontRef>
+          </p:style>
+          <p:txBody>
+            <a:bodyPr rtlCol="0" anchor="ctr"/>
+            <a:lstStyle/>
+            <a:p>
+              <a:r>
+                <a:rPr kumimoji="1" lang="ja-JP" altLang="en-US" sz="2800" dirty="0">
+                  <a:solidFill>
+                    <a:schemeClr val="accent1">
+                      <a:lumMod val="60000"/>
+                      <a:lumOff val="40000"/>
+                    </a:schemeClr>
+                  </a:solidFill>
+                  <a:latin typeface="HGP創英角ﾎﾟｯﾌﾟ体" panose="040B0A00000000000000" pitchFamily="50" charset="-128"/>
+                  <a:ea typeface="HGP創英角ﾎﾟｯﾌﾟ体" panose="040B0A00000000000000" pitchFamily="50" charset="-128"/>
+                </a:rPr>
+                <a:t>　採用担当の元へデータが送られる</a:t>
+              </a:r>
+            </a:p>
+          </p:txBody>
+        </p:sp>
+      </p:grpSp>
+      <p:sp>
+        <p:nvSpPr>
+          <p:cNvPr id="3" name="正方形/長方形 2">
+            <a:extLst>
+              <a:ext uri="{FF2B5EF4-FFF2-40B4-BE49-F238E27FC236}">
+                <a16:creationId xmlns:a16="http://schemas.microsoft.com/office/drawing/2014/main" id="{B27F26AC-072A-BE78-C9D6-F906B7699E0B}"/>
+              </a:ext>
+            </a:extLst>
+          </p:cNvPr>
+          <p:cNvSpPr/>
+          <p:nvPr/>
+        </p:nvSpPr>
+        <p:spPr>
+          <a:xfrm>
+            <a:off x="1931542" y="1489753"/>
+            <a:ext cx="678094" cy="123290"/>
+          </a:xfrm>
+          <a:prstGeom prst="rect">
+            <a:avLst/>
+          </a:prstGeom>
+          <a:solidFill>
+            <a:schemeClr val="bg1"/>
+          </a:solidFill>
+          <a:ln>
+            <a:noFill/>
           </a:ln>
         </p:spPr>
         <p:style>
@@ -10531,140 +10872,17 @@
           <a:bodyPr rtlCol="0" anchor="ctr"/>
           <a:lstStyle/>
           <a:p>
-            <a:r>
-              <a:rPr kumimoji="1" lang="ja-JP" altLang="en-US" sz="2800" dirty="0">
-                <a:solidFill>
-                  <a:schemeClr val="tx1"/>
-                </a:solidFill>
-                <a:latin typeface="HGP創英角ﾎﾟｯﾌﾟ体" panose="040B0A00000000000000" pitchFamily="50" charset="-128"/>
-                <a:ea typeface="HGP創英角ﾎﾟｯﾌﾟ体" panose="040B0A00000000000000" pitchFamily="50" charset="-128"/>
-              </a:rPr>
-              <a:t>応募者に</a:t>
-            </a:r>
-            <a:endParaRPr kumimoji="1" lang="en-US" altLang="ja-JP" sz="2800" dirty="0">
-              <a:solidFill>
-                <a:schemeClr val="tx1"/>
-              </a:solidFill>
-              <a:latin typeface="HGP創英角ﾎﾟｯﾌﾟ体" panose="040B0A00000000000000" pitchFamily="50" charset="-128"/>
-              <a:ea typeface="HGP創英角ﾎﾟｯﾌﾟ体" panose="040B0A00000000000000" pitchFamily="50" charset="-128"/>
-            </a:endParaRPr>
-          </a:p>
-          <a:p>
-            <a:endParaRPr kumimoji="1" lang="en-US" altLang="ja-JP" sz="2800" dirty="0">
-              <a:solidFill>
-                <a:schemeClr val="tx1"/>
-              </a:solidFill>
-              <a:latin typeface="HGP創英角ﾎﾟｯﾌﾟ体" panose="040B0A00000000000000" pitchFamily="50" charset="-128"/>
-              <a:ea typeface="HGP創英角ﾎﾟｯﾌﾟ体" panose="040B0A00000000000000" pitchFamily="50" charset="-128"/>
-            </a:endParaRPr>
-          </a:p>
-          <a:p>
-            <a:r>
-              <a:rPr kumimoji="1" lang="ja-JP" altLang="en-US" sz="2800" dirty="0">
-                <a:solidFill>
-                  <a:schemeClr val="tx1"/>
-                </a:solidFill>
-                <a:latin typeface="HGP創英角ﾎﾟｯﾌﾟ体" panose="040B0A00000000000000" pitchFamily="50" charset="-128"/>
-                <a:ea typeface="HGP創英角ﾎﾟｯﾌﾟ体" panose="040B0A00000000000000" pitchFamily="50" charset="-128"/>
-              </a:rPr>
-              <a:t>①名前　②カナ　③性別</a:t>
-            </a:r>
-            <a:endParaRPr kumimoji="1" lang="en-US" altLang="ja-JP" sz="2800" dirty="0">
-              <a:solidFill>
-                <a:schemeClr val="tx1"/>
-              </a:solidFill>
-              <a:latin typeface="HGP創英角ﾎﾟｯﾌﾟ体" panose="040B0A00000000000000" pitchFamily="50" charset="-128"/>
-              <a:ea typeface="HGP創英角ﾎﾟｯﾌﾟ体" panose="040B0A00000000000000" pitchFamily="50" charset="-128"/>
-            </a:endParaRPr>
-          </a:p>
-          <a:p>
-            <a:r>
-              <a:rPr kumimoji="1" lang="ja-JP" altLang="en-US" sz="2800" dirty="0">
-                <a:solidFill>
-                  <a:schemeClr val="tx1"/>
-                </a:solidFill>
-                <a:latin typeface="HGP創英角ﾎﾟｯﾌﾟ体" panose="040B0A00000000000000" pitchFamily="50" charset="-128"/>
-                <a:ea typeface="HGP創英角ﾎﾟｯﾌﾟ体" panose="040B0A00000000000000" pitchFamily="50" charset="-128"/>
-              </a:rPr>
-              <a:t>④生年月日　⑤メールアドレス</a:t>
-            </a:r>
-            <a:endParaRPr kumimoji="1" lang="en-US" altLang="ja-JP" sz="2800" dirty="0">
-              <a:solidFill>
-                <a:schemeClr val="tx1"/>
-              </a:solidFill>
-              <a:latin typeface="HGP創英角ﾎﾟｯﾌﾟ体" panose="040B0A00000000000000" pitchFamily="50" charset="-128"/>
-              <a:ea typeface="HGP創英角ﾎﾟｯﾌﾟ体" panose="040B0A00000000000000" pitchFamily="50" charset="-128"/>
-            </a:endParaRPr>
-          </a:p>
-          <a:p>
-            <a:r>
-              <a:rPr kumimoji="1" lang="ja-JP" altLang="en-US" sz="2800" dirty="0">
-                <a:solidFill>
-                  <a:schemeClr val="tx1"/>
-                </a:solidFill>
-                <a:latin typeface="HGP創英角ﾎﾟｯﾌﾟ体" panose="040B0A00000000000000" pitchFamily="50" charset="-128"/>
-                <a:ea typeface="HGP創英角ﾎﾟｯﾌﾟ体" panose="040B0A00000000000000" pitchFamily="50" charset="-128"/>
-              </a:rPr>
-              <a:t>⑥電話番号　⑦郵便番号</a:t>
-            </a:r>
-            <a:endParaRPr kumimoji="1" lang="en-US" altLang="ja-JP" sz="2800" dirty="0">
-              <a:solidFill>
-                <a:schemeClr val="tx1"/>
-              </a:solidFill>
-              <a:latin typeface="HGP創英角ﾎﾟｯﾌﾟ体" panose="040B0A00000000000000" pitchFamily="50" charset="-128"/>
-              <a:ea typeface="HGP創英角ﾎﾟｯﾌﾟ体" panose="040B0A00000000000000" pitchFamily="50" charset="-128"/>
-            </a:endParaRPr>
-          </a:p>
-          <a:p>
-            <a:r>
-              <a:rPr kumimoji="1" lang="ja-JP" altLang="en-US" sz="2800" dirty="0">
-                <a:solidFill>
-                  <a:schemeClr val="tx1"/>
-                </a:solidFill>
-                <a:latin typeface="HGP創英角ﾎﾟｯﾌﾟ体" panose="040B0A00000000000000" pitchFamily="50" charset="-128"/>
-                <a:ea typeface="HGP創英角ﾎﾟｯﾌﾟ体" panose="040B0A00000000000000" pitchFamily="50" charset="-128"/>
-              </a:rPr>
-              <a:t>⑧住所　⑨最終学歴　⑩希望勤務地</a:t>
-            </a:r>
-            <a:endParaRPr kumimoji="1" lang="en-US" altLang="ja-JP" sz="2800" dirty="0">
-              <a:solidFill>
-                <a:schemeClr val="tx1"/>
-              </a:solidFill>
-              <a:latin typeface="HGP創英角ﾎﾟｯﾌﾟ体" panose="040B0A00000000000000" pitchFamily="50" charset="-128"/>
-              <a:ea typeface="HGP創英角ﾎﾟｯﾌﾟ体" panose="040B0A00000000000000" pitchFamily="50" charset="-128"/>
-            </a:endParaRPr>
-          </a:p>
-          <a:p>
-            <a:endParaRPr kumimoji="1" lang="en-US" altLang="ja-JP" sz="2800" dirty="0">
-              <a:solidFill>
-                <a:schemeClr val="tx1"/>
-              </a:solidFill>
-              <a:latin typeface="HGP創英角ﾎﾟｯﾌﾟ体" panose="040B0A00000000000000" pitchFamily="50" charset="-128"/>
-              <a:ea typeface="HGP創英角ﾎﾟｯﾌﾟ体" panose="040B0A00000000000000" pitchFamily="50" charset="-128"/>
-            </a:endParaRPr>
-          </a:p>
-          <a:p>
-            <a:pPr algn="r"/>
-            <a:r>
-              <a:rPr kumimoji="1" lang="ja-JP" altLang="en-US" sz="2800" dirty="0">
-                <a:solidFill>
-                  <a:schemeClr val="tx1"/>
-                </a:solidFill>
-                <a:latin typeface="HGP創英角ﾎﾟｯﾌﾟ体" panose="040B0A00000000000000" pitchFamily="50" charset="-128"/>
-                <a:ea typeface="HGP創英角ﾎﾟｯﾌﾟ体" panose="040B0A00000000000000" pitchFamily="50" charset="-128"/>
-              </a:rPr>
-              <a:t>を入力してもらう！</a:t>
-            </a:r>
-            <a:endParaRPr kumimoji="1" lang="ja-JP" altLang="en-US" dirty="0"/>
-          </a:p>
-        </p:txBody>
-      </p:sp>
-      <p:sp>
-        <p:nvSpPr>
-          <p:cNvPr id="7" name="矢印: 下 6">
-            <a:extLst>
-              <a:ext uri="{FF2B5EF4-FFF2-40B4-BE49-F238E27FC236}">
-                <a16:creationId xmlns:a16="http://schemas.microsoft.com/office/drawing/2014/main" id="{92E266E8-2BB1-0B6E-32EB-84EC18BBDFEE}"/>
+            <a:pPr algn="ctr"/>
+            <a:endParaRPr kumimoji="1" lang="ja-JP" altLang="en-US"/>
+          </a:p>
+        </p:txBody>
+      </p:sp>
+      <p:sp>
+        <p:nvSpPr>
+          <p:cNvPr id="10" name="正方形/長方形 9">
+            <a:extLst>
+              <a:ext uri="{FF2B5EF4-FFF2-40B4-BE49-F238E27FC236}">
+                <a16:creationId xmlns:a16="http://schemas.microsoft.com/office/drawing/2014/main" id="{7E63CB98-3A08-A3C4-5F7A-F0D44C86CC5F}"/>
               </a:ext>
             </a:extLst>
           </p:cNvPr>
@@ -10673,19 +10891,17 @@
         </p:nvSpPr>
         <p:spPr>
           <a:xfrm>
-            <a:off x="8003569" y="4479533"/>
-            <a:ext cx="1284270" cy="832207"/>
-          </a:xfrm>
-          <a:prstGeom prst="downArrow">
+            <a:off x="1909280" y="1837362"/>
+            <a:ext cx="936661" cy="176373"/>
+          </a:xfrm>
+          <a:prstGeom prst="rect">
             <a:avLst/>
           </a:prstGeom>
           <a:solidFill>
-            <a:srgbClr val="FFC000"/>
+            <a:schemeClr val="bg1"/>
           </a:solidFill>
           <a:ln>
-            <a:solidFill>
-              <a:srgbClr val="FFC000"/>
-            </a:solidFill>
+            <a:noFill/>
           </a:ln>
         </p:spPr>
         <p:style>
@@ -10713,57 +10929,29 @@
           </a:p>
         </p:txBody>
       </p:sp>
-      <p:pic>
-        <p:nvPicPr>
-          <p:cNvPr id="9" name="図 8" descr="メール パソコンのロイヤリティフリーイラスト素材 58,900点以上 - iStock">
-            <a:extLst>
-              <a:ext uri="{FF2B5EF4-FFF2-40B4-BE49-F238E27FC236}">
-                <a16:creationId xmlns:a16="http://schemas.microsoft.com/office/drawing/2014/main" id="{FE642934-F745-13A7-5AF7-291D17C73C0E}"/>
-              </a:ext>
-            </a:extLst>
-          </p:cNvPr>
-          <p:cNvPicPr>
-            <a:picLocks noChangeAspect="1"/>
-          </p:cNvPicPr>
+      <p:sp>
+        <p:nvSpPr>
+          <p:cNvPr id="12" name="正方形/長方形 11">
+            <a:extLst>
+              <a:ext uri="{FF2B5EF4-FFF2-40B4-BE49-F238E27FC236}">
+                <a16:creationId xmlns:a16="http://schemas.microsoft.com/office/drawing/2014/main" id="{E813BF7D-A4A5-A5B3-3B1B-D7A9E867F1BE}"/>
+              </a:ext>
+            </a:extLst>
+          </p:cNvPr>
+          <p:cNvSpPr/>
           <p:nvPr/>
-        </p:nvPicPr>
-        <p:blipFill>
-          <a:blip r:embed="rId3"/>
-          <a:stretch>
-            <a:fillRect/>
-          </a:stretch>
-        </p:blipFill>
-        <p:spPr>
-          <a:xfrm rot="822810">
-            <a:off x="9988028" y="4905444"/>
-            <a:ext cx="1929255" cy="1654998"/>
+        </p:nvSpPr>
+        <p:spPr>
+          <a:xfrm>
+            <a:off x="1921268" y="2609635"/>
+            <a:ext cx="636998" cy="143839"/>
           </a:xfrm>
           <a:prstGeom prst="rect">
             <a:avLst/>
           </a:prstGeom>
-        </p:spPr>
-      </p:pic>
-      <p:sp>
-        <p:nvSpPr>
-          <p:cNvPr id="8" name="正方形/長方形 7">
-            <a:extLst>
-              <a:ext uri="{FF2B5EF4-FFF2-40B4-BE49-F238E27FC236}">
-                <a16:creationId xmlns:a16="http://schemas.microsoft.com/office/drawing/2014/main" id="{727CFADC-76E5-2933-FDC8-805DA90652B1}"/>
-              </a:ext>
-            </a:extLst>
-          </p:cNvPr>
-          <p:cNvSpPr/>
-          <p:nvPr/>
-        </p:nvSpPr>
-        <p:spPr>
-          <a:xfrm>
-            <a:off x="4722687" y="5311741"/>
-            <a:ext cx="6667928" cy="1263721"/>
-          </a:xfrm>
-          <a:prstGeom prst="rect">
-            <a:avLst/>
-          </a:prstGeom>
-          <a:noFill/>
+          <a:solidFill>
+            <a:schemeClr val="bg1"/>
+          </a:solidFill>
           <a:ln>
             <a:noFill/>
           </a:ln>
@@ -10788,19 +10976,320 @@
           <a:bodyPr rtlCol="0" anchor="ctr"/>
           <a:lstStyle/>
           <a:p>
-            <a:r>
-              <a:rPr kumimoji="1" lang="ja-JP" altLang="en-US" sz="2800" dirty="0">
-                <a:solidFill>
-                  <a:schemeClr val="accent1">
-                    <a:lumMod val="60000"/>
-                    <a:lumOff val="40000"/>
-                  </a:schemeClr>
-                </a:solidFill>
-                <a:latin typeface="HGP創英角ﾎﾟｯﾌﾟ体" panose="040B0A00000000000000" pitchFamily="50" charset="-128"/>
-                <a:ea typeface="HGP創英角ﾎﾟｯﾌﾟ体" panose="040B0A00000000000000" pitchFamily="50" charset="-128"/>
-              </a:rPr>
-              <a:t>　採用担当の元へデータが送られる</a:t>
-            </a:r>
+            <a:pPr algn="ctr"/>
+            <a:endParaRPr kumimoji="1" lang="ja-JP" altLang="en-US"/>
+          </a:p>
+        </p:txBody>
+      </p:sp>
+      <p:sp>
+        <p:nvSpPr>
+          <p:cNvPr id="14" name="正方形/長方形 13">
+            <a:extLst>
+              <a:ext uri="{FF2B5EF4-FFF2-40B4-BE49-F238E27FC236}">
+                <a16:creationId xmlns:a16="http://schemas.microsoft.com/office/drawing/2014/main" id="{1B2A3DD3-AB6F-8EAC-81DD-989522C74BDD}"/>
+              </a:ext>
+            </a:extLst>
+          </p:cNvPr>
+          <p:cNvSpPr/>
+          <p:nvPr/>
+        </p:nvSpPr>
+        <p:spPr>
+          <a:xfrm>
+            <a:off x="1962364" y="2969232"/>
+            <a:ext cx="1160979" cy="123290"/>
+          </a:xfrm>
+          <a:prstGeom prst="rect">
+            <a:avLst/>
+          </a:prstGeom>
+          <a:solidFill>
+            <a:schemeClr val="bg1"/>
+          </a:solidFill>
+          <a:ln>
+            <a:noFill/>
+          </a:ln>
+        </p:spPr>
+        <p:style>
+          <a:lnRef idx="2">
+            <a:schemeClr val="accent1">
+              <a:shade val="15000"/>
+            </a:schemeClr>
+          </a:lnRef>
+          <a:fillRef idx="1">
+            <a:schemeClr val="accent1"/>
+          </a:fillRef>
+          <a:effectRef idx="0">
+            <a:schemeClr val="accent1"/>
+          </a:effectRef>
+          <a:fontRef idx="minor">
+            <a:schemeClr val="lt1"/>
+          </a:fontRef>
+        </p:style>
+        <p:txBody>
+          <a:bodyPr rtlCol="0" anchor="ctr"/>
+          <a:lstStyle/>
+          <a:p>
+            <a:pPr algn="ctr"/>
+            <a:endParaRPr kumimoji="1" lang="ja-JP" altLang="en-US"/>
+          </a:p>
+        </p:txBody>
+      </p:sp>
+      <p:sp>
+        <p:nvSpPr>
+          <p:cNvPr id="16" name="正方形/長方形 15">
+            <a:extLst>
+              <a:ext uri="{FF2B5EF4-FFF2-40B4-BE49-F238E27FC236}">
+                <a16:creationId xmlns:a16="http://schemas.microsoft.com/office/drawing/2014/main" id="{BF945724-EF40-641E-30E4-27347266F69C}"/>
+              </a:ext>
+            </a:extLst>
+          </p:cNvPr>
+          <p:cNvSpPr/>
+          <p:nvPr/>
+        </p:nvSpPr>
+        <p:spPr>
+          <a:xfrm>
+            <a:off x="1941815" y="3369923"/>
+            <a:ext cx="842482" cy="174661"/>
+          </a:xfrm>
+          <a:prstGeom prst="rect">
+            <a:avLst/>
+          </a:prstGeom>
+          <a:solidFill>
+            <a:schemeClr val="bg1"/>
+          </a:solidFill>
+          <a:ln>
+            <a:noFill/>
+          </a:ln>
+        </p:spPr>
+        <p:style>
+          <a:lnRef idx="2">
+            <a:schemeClr val="accent1">
+              <a:shade val="15000"/>
+            </a:schemeClr>
+          </a:lnRef>
+          <a:fillRef idx="1">
+            <a:schemeClr val="accent1"/>
+          </a:fillRef>
+          <a:effectRef idx="0">
+            <a:schemeClr val="accent1"/>
+          </a:effectRef>
+          <a:fontRef idx="minor">
+            <a:schemeClr val="lt1"/>
+          </a:fontRef>
+        </p:style>
+        <p:txBody>
+          <a:bodyPr rtlCol="0" anchor="ctr"/>
+          <a:lstStyle/>
+          <a:p>
+            <a:pPr algn="ctr"/>
+            <a:endParaRPr kumimoji="1" lang="ja-JP" altLang="en-US"/>
+          </a:p>
+        </p:txBody>
+      </p:sp>
+      <p:sp>
+        <p:nvSpPr>
+          <p:cNvPr id="18" name="正方形/長方形 17">
+            <a:extLst>
+              <a:ext uri="{FF2B5EF4-FFF2-40B4-BE49-F238E27FC236}">
+                <a16:creationId xmlns:a16="http://schemas.microsoft.com/office/drawing/2014/main" id="{A0222C3D-2B44-B448-70F4-23F44256C591}"/>
+              </a:ext>
+            </a:extLst>
+          </p:cNvPr>
+          <p:cNvSpPr/>
+          <p:nvPr/>
+        </p:nvSpPr>
+        <p:spPr>
+          <a:xfrm>
+            <a:off x="1962364" y="3801437"/>
+            <a:ext cx="636998" cy="143839"/>
+          </a:xfrm>
+          <a:prstGeom prst="rect">
+            <a:avLst/>
+          </a:prstGeom>
+          <a:solidFill>
+            <a:schemeClr val="bg1"/>
+          </a:solidFill>
+          <a:ln>
+            <a:noFill/>
+          </a:ln>
+        </p:spPr>
+        <p:style>
+          <a:lnRef idx="2">
+            <a:schemeClr val="accent1">
+              <a:shade val="15000"/>
+            </a:schemeClr>
+          </a:lnRef>
+          <a:fillRef idx="1">
+            <a:schemeClr val="accent1"/>
+          </a:fillRef>
+          <a:effectRef idx="0">
+            <a:schemeClr val="accent1"/>
+          </a:effectRef>
+          <a:fontRef idx="minor">
+            <a:schemeClr val="lt1"/>
+          </a:fontRef>
+        </p:style>
+        <p:txBody>
+          <a:bodyPr rtlCol="0" anchor="ctr"/>
+          <a:lstStyle/>
+          <a:p>
+            <a:pPr algn="ctr"/>
+            <a:endParaRPr kumimoji="1" lang="ja-JP" altLang="en-US"/>
+          </a:p>
+        </p:txBody>
+      </p:sp>
+      <p:sp>
+        <p:nvSpPr>
+          <p:cNvPr id="20" name="正方形/長方形 19">
+            <a:extLst>
+              <a:ext uri="{FF2B5EF4-FFF2-40B4-BE49-F238E27FC236}">
+                <a16:creationId xmlns:a16="http://schemas.microsoft.com/office/drawing/2014/main" id="{F8C6DA3F-E32E-E4DD-54F5-376F097E7872}"/>
+              </a:ext>
+            </a:extLst>
+          </p:cNvPr>
+          <p:cNvSpPr/>
+          <p:nvPr/>
+        </p:nvSpPr>
+        <p:spPr>
+          <a:xfrm>
+            <a:off x="1972637" y="4212404"/>
+            <a:ext cx="1356189" cy="205483"/>
+          </a:xfrm>
+          <a:prstGeom prst="rect">
+            <a:avLst/>
+          </a:prstGeom>
+          <a:solidFill>
+            <a:schemeClr val="bg1"/>
+          </a:solidFill>
+          <a:ln>
+            <a:noFill/>
+          </a:ln>
+        </p:spPr>
+        <p:style>
+          <a:lnRef idx="2">
+            <a:schemeClr val="accent1">
+              <a:shade val="15000"/>
+            </a:schemeClr>
+          </a:lnRef>
+          <a:fillRef idx="1">
+            <a:schemeClr val="accent1"/>
+          </a:fillRef>
+          <a:effectRef idx="0">
+            <a:schemeClr val="accent1"/>
+          </a:effectRef>
+          <a:fontRef idx="minor">
+            <a:schemeClr val="lt1"/>
+          </a:fontRef>
+        </p:style>
+        <p:txBody>
+          <a:bodyPr rtlCol="0" anchor="ctr"/>
+          <a:lstStyle/>
+          <a:p>
+            <a:pPr algn="ctr"/>
+            <a:endParaRPr kumimoji="1" lang="ja-JP" altLang="en-US"/>
+          </a:p>
+        </p:txBody>
+      </p:sp>
+      <p:sp>
+        <p:nvSpPr>
+          <p:cNvPr id="22" name="正方形/長方形 21">
+            <a:extLst>
+              <a:ext uri="{FF2B5EF4-FFF2-40B4-BE49-F238E27FC236}">
+                <a16:creationId xmlns:a16="http://schemas.microsoft.com/office/drawing/2014/main" id="{C9FEDBB6-3AA7-BA51-EFBF-5F0F34DA9800}"/>
+              </a:ext>
+            </a:extLst>
+          </p:cNvPr>
+          <p:cNvSpPr/>
+          <p:nvPr/>
+        </p:nvSpPr>
+        <p:spPr>
+          <a:xfrm>
+            <a:off x="1941815" y="4869951"/>
+            <a:ext cx="760287" cy="123290"/>
+          </a:xfrm>
+          <a:prstGeom prst="rect">
+            <a:avLst/>
+          </a:prstGeom>
+          <a:solidFill>
+            <a:schemeClr val="bg1"/>
+          </a:solidFill>
+          <a:ln>
+            <a:noFill/>
+          </a:ln>
+        </p:spPr>
+        <p:style>
+          <a:lnRef idx="2">
+            <a:schemeClr val="accent1">
+              <a:shade val="15000"/>
+            </a:schemeClr>
+          </a:lnRef>
+          <a:fillRef idx="1">
+            <a:schemeClr val="accent1"/>
+          </a:fillRef>
+          <a:effectRef idx="0">
+            <a:schemeClr val="accent1"/>
+          </a:effectRef>
+          <a:fontRef idx="minor">
+            <a:schemeClr val="lt1"/>
+          </a:fontRef>
+        </p:style>
+        <p:txBody>
+          <a:bodyPr rtlCol="0" anchor="ctr"/>
+          <a:lstStyle/>
+          <a:p>
+            <a:pPr algn="ctr"/>
+            <a:endParaRPr kumimoji="1" lang="ja-JP" altLang="en-US"/>
+          </a:p>
+        </p:txBody>
+      </p:sp>
+      <p:sp>
+        <p:nvSpPr>
+          <p:cNvPr id="24" name="正方形/長方形 23">
+            <a:extLst>
+              <a:ext uri="{FF2B5EF4-FFF2-40B4-BE49-F238E27FC236}">
+                <a16:creationId xmlns:a16="http://schemas.microsoft.com/office/drawing/2014/main" id="{CD372F1E-D132-567F-3B5F-6C7D637EE49D}"/>
+              </a:ext>
+            </a:extLst>
+          </p:cNvPr>
+          <p:cNvSpPr/>
+          <p:nvPr/>
+        </p:nvSpPr>
+        <p:spPr>
+          <a:xfrm>
+            <a:off x="1888731" y="5268931"/>
+            <a:ext cx="760287" cy="123290"/>
+          </a:xfrm>
+          <a:prstGeom prst="rect">
+            <a:avLst/>
+          </a:prstGeom>
+          <a:solidFill>
+            <a:schemeClr val="bg1"/>
+          </a:solidFill>
+          <a:ln>
+            <a:noFill/>
+          </a:ln>
+        </p:spPr>
+        <p:style>
+          <a:lnRef idx="2">
+            <a:schemeClr val="accent1">
+              <a:shade val="15000"/>
+            </a:schemeClr>
+          </a:lnRef>
+          <a:fillRef idx="1">
+            <a:schemeClr val="accent1"/>
+          </a:fillRef>
+          <a:effectRef idx="0">
+            <a:schemeClr val="accent1"/>
+          </a:effectRef>
+          <a:fontRef idx="minor">
+            <a:schemeClr val="lt1"/>
+          </a:fontRef>
+        </p:style>
+        <p:txBody>
+          <a:bodyPr rtlCol="0" anchor="ctr"/>
+          <a:lstStyle/>
+          <a:p>
+            <a:pPr algn="ctr"/>
+            <a:endParaRPr kumimoji="1" lang="ja-JP" altLang="en-US"/>
           </a:p>
         </p:txBody>
       </p:sp>
@@ -10917,36 +11406,6 @@
           </a:p>
         </p:txBody>
       </p:sp>
-      <p:pic>
-        <p:nvPicPr>
-          <p:cNvPr id="18" name="図 17">
-            <a:extLst>
-              <a:ext uri="{FF2B5EF4-FFF2-40B4-BE49-F238E27FC236}">
-                <a16:creationId xmlns:a16="http://schemas.microsoft.com/office/drawing/2014/main" id="{4D9C045F-62C1-D9D4-F454-CE31A01A92F8}"/>
-              </a:ext>
-            </a:extLst>
-          </p:cNvPr>
-          <p:cNvPicPr>
-            <a:picLocks noChangeAspect="1"/>
-          </p:cNvPicPr>
-          <p:nvPr/>
-        </p:nvPicPr>
-        <p:blipFill>
-          <a:blip r:embed="rId2"/>
-          <a:stretch>
-            <a:fillRect/>
-          </a:stretch>
-        </p:blipFill>
-        <p:spPr>
-          <a:xfrm>
-            <a:off x="698643" y="3969753"/>
-            <a:ext cx="10484683" cy="2482417"/>
-          </a:xfrm>
-          <a:prstGeom prst="rect">
-            <a:avLst/>
-          </a:prstGeom>
-        </p:spPr>
-      </p:pic>
       <p:sp>
         <p:nvSpPr>
           <p:cNvPr id="21" name="正方形/長方形 20">
@@ -11053,10 +11512,10 @@
       </p:sp>
       <p:grpSp>
         <p:nvGrpSpPr>
-          <p:cNvPr id="26" name="グループ化 25">
-            <a:extLst>
-              <a:ext uri="{FF2B5EF4-FFF2-40B4-BE49-F238E27FC236}">
-                <a16:creationId xmlns:a16="http://schemas.microsoft.com/office/drawing/2014/main" id="{35A4EDD3-CF33-0BC4-5B28-51B9DC1188BE}"/>
+          <p:cNvPr id="3" name="グループ化 2">
+            <a:extLst>
+              <a:ext uri="{FF2B5EF4-FFF2-40B4-BE49-F238E27FC236}">
+                <a16:creationId xmlns:a16="http://schemas.microsoft.com/office/drawing/2014/main" id="{EE6529BC-8898-8442-E5D2-2BA77DCFE676}"/>
               </a:ext>
             </a:extLst>
           </p:cNvPr>
@@ -11066,17 +11525,17 @@
         <p:grpSpPr>
           <a:xfrm>
             <a:off x="604298" y="1408273"/>
-            <a:ext cx="10502066" cy="2281698"/>
-            <a:chOff x="676217" y="1213064"/>
-            <a:chExt cx="10502066" cy="2281698"/>
+            <a:ext cx="10579028" cy="5043897"/>
+            <a:chOff x="604298" y="1408273"/>
+            <a:chExt cx="10579028" cy="5043897"/>
           </a:xfrm>
         </p:grpSpPr>
         <p:pic>
           <p:nvPicPr>
-            <p:cNvPr id="20" name="図 19">
+            <p:cNvPr id="18" name="図 17">
               <a:extLst>
                 <a:ext uri="{FF2B5EF4-FFF2-40B4-BE49-F238E27FC236}">
-                  <a16:creationId xmlns:a16="http://schemas.microsoft.com/office/drawing/2014/main" id="{59152DC1-C53B-5AC5-6A43-443A1280D0E7}"/>
+                  <a16:creationId xmlns:a16="http://schemas.microsoft.com/office/drawing/2014/main" id="{4D9C045F-62C1-D9D4-F454-CE31A01A92F8}"/>
                 </a:ext>
               </a:extLst>
             </p:cNvPr>
@@ -11086,57 +11545,160 @@
             <p:nvPr/>
           </p:nvPicPr>
           <p:blipFill>
-            <a:blip r:embed="rId3"/>
+            <a:blip r:embed="rId2"/>
             <a:stretch>
               <a:fillRect/>
             </a:stretch>
           </p:blipFill>
           <p:spPr>
             <a:xfrm>
-              <a:off x="676217" y="1213064"/>
-              <a:ext cx="10502066" cy="2281698"/>
+              <a:off x="698643" y="3969753"/>
+              <a:ext cx="10484683" cy="2482417"/>
             </a:xfrm>
             <a:prstGeom prst="rect">
               <a:avLst/>
             </a:prstGeom>
           </p:spPr>
         </p:pic>
-        <p:pic>
-          <p:nvPicPr>
-            <p:cNvPr id="24" name="図 23">
+        <p:grpSp>
+          <p:nvGrpSpPr>
+            <p:cNvPr id="26" name="グループ化 25">
               <a:extLst>
                 <a:ext uri="{FF2B5EF4-FFF2-40B4-BE49-F238E27FC236}">
-                  <a16:creationId xmlns:a16="http://schemas.microsoft.com/office/drawing/2014/main" id="{C6DCBB15-27C3-9D83-ACAA-F9B9A0593DE0}"/>
+                  <a16:creationId xmlns:a16="http://schemas.microsoft.com/office/drawing/2014/main" id="{35A4EDD3-CF33-0BC4-5B28-51B9DC1188BE}"/>
                 </a:ext>
               </a:extLst>
             </p:cNvPr>
-            <p:cNvPicPr>
-              <a:picLocks noChangeAspect="1"/>
-            </p:cNvPicPr>
+            <p:cNvGrpSpPr/>
             <p:nvPr/>
-          </p:nvPicPr>
-          <p:blipFill>
-            <a:blip r:embed="rId4"/>
-            <a:stretch>
-              <a:fillRect/>
-            </a:stretch>
-          </p:blipFill>
-          <p:spPr>
+          </p:nvGrpSpPr>
+          <p:grpSpPr>
             <a:xfrm>
-              <a:off x="863030" y="2092815"/>
-              <a:ext cx="3852809" cy="436550"/>
+              <a:off x="604298" y="1408273"/>
+              <a:ext cx="10502066" cy="2281698"/>
+              <a:chOff x="676217" y="1213064"/>
+              <a:chExt cx="10502066" cy="2281698"/>
             </a:xfrm>
-            <a:prstGeom prst="rect">
-              <a:avLst/>
-            </a:prstGeom>
-          </p:spPr>
-        </p:pic>
+          </p:grpSpPr>
+          <p:pic>
+            <p:nvPicPr>
+              <p:cNvPr id="20" name="図 19">
+                <a:extLst>
+                  <a:ext uri="{FF2B5EF4-FFF2-40B4-BE49-F238E27FC236}">
+                    <a16:creationId xmlns:a16="http://schemas.microsoft.com/office/drawing/2014/main" id="{59152DC1-C53B-5AC5-6A43-443A1280D0E7}"/>
+                  </a:ext>
+                </a:extLst>
+              </p:cNvPr>
+              <p:cNvPicPr>
+                <a:picLocks noChangeAspect="1"/>
+              </p:cNvPicPr>
+              <p:nvPr/>
+            </p:nvPicPr>
+            <p:blipFill>
+              <a:blip r:embed="rId3"/>
+              <a:stretch>
+                <a:fillRect/>
+              </a:stretch>
+            </p:blipFill>
+            <p:spPr>
+              <a:xfrm>
+                <a:off x="676217" y="1213064"/>
+                <a:ext cx="10502066" cy="2281698"/>
+              </a:xfrm>
+              <a:prstGeom prst="rect">
+                <a:avLst/>
+              </a:prstGeom>
+            </p:spPr>
+          </p:pic>
+          <p:pic>
+            <p:nvPicPr>
+              <p:cNvPr id="24" name="図 23">
+                <a:extLst>
+                  <a:ext uri="{FF2B5EF4-FFF2-40B4-BE49-F238E27FC236}">
+                    <a16:creationId xmlns:a16="http://schemas.microsoft.com/office/drawing/2014/main" id="{C6DCBB15-27C3-9D83-ACAA-F9B9A0593DE0}"/>
+                  </a:ext>
+                </a:extLst>
+              </p:cNvPr>
+              <p:cNvPicPr>
+                <a:picLocks noChangeAspect="1"/>
+              </p:cNvPicPr>
+              <p:nvPr/>
+            </p:nvPicPr>
+            <p:blipFill>
+              <a:blip r:embed="rId4"/>
+              <a:stretch>
+                <a:fillRect/>
+              </a:stretch>
+            </p:blipFill>
+            <p:spPr>
+              <a:xfrm>
+                <a:off x="863030" y="2092815"/>
+                <a:ext cx="3852809" cy="436550"/>
+              </a:xfrm>
+              <a:prstGeom prst="rect">
+                <a:avLst/>
+              </a:prstGeom>
+            </p:spPr>
+          </p:pic>
+          <p:sp>
+            <p:nvSpPr>
+              <p:cNvPr id="25" name="正方形/長方形 24">
+                <a:extLst>
+                  <a:ext uri="{FF2B5EF4-FFF2-40B4-BE49-F238E27FC236}">
+                    <a16:creationId xmlns:a16="http://schemas.microsoft.com/office/drawing/2014/main" id="{D72FD3C7-F3DA-FC74-C50E-506AB5C829B9}"/>
+                  </a:ext>
+                </a:extLst>
+              </p:cNvPr>
+              <p:cNvSpPr/>
+              <p:nvPr/>
+            </p:nvSpPr>
+            <p:spPr>
+              <a:xfrm>
+                <a:off x="873303" y="2547991"/>
+                <a:ext cx="3904180" cy="308225"/>
+              </a:xfrm>
+              <a:prstGeom prst="rect">
+                <a:avLst/>
+              </a:prstGeom>
+              <a:solidFill>
+                <a:schemeClr val="bg1"/>
+              </a:solidFill>
+              <a:ln>
+                <a:noFill/>
+              </a:ln>
+            </p:spPr>
+            <p:style>
+              <a:lnRef idx="2">
+                <a:schemeClr val="accent1">
+                  <a:shade val="15000"/>
+                </a:schemeClr>
+              </a:lnRef>
+              <a:fillRef idx="1">
+                <a:schemeClr val="accent1"/>
+              </a:fillRef>
+              <a:effectRef idx="0">
+                <a:schemeClr val="accent1"/>
+              </a:effectRef>
+              <a:fontRef idx="minor">
+                <a:schemeClr val="lt1"/>
+              </a:fontRef>
+            </p:style>
+            <p:txBody>
+              <a:bodyPr rtlCol="0" anchor="ctr"/>
+              <a:lstStyle/>
+              <a:p>
+                <a:pPr algn="ctr"/>
+                <a:endParaRPr kumimoji="1" lang="ja-JP" altLang="en-US"/>
+              </a:p>
+            </p:txBody>
+          </p:sp>
+        </p:grpSp>
         <p:sp>
           <p:nvSpPr>
-            <p:cNvPr id="25" name="正方形/長方形 24">
+            <p:cNvPr id="28" name="矢印: 下 27">
               <a:extLst>
                 <a:ext uri="{FF2B5EF4-FFF2-40B4-BE49-F238E27FC236}">
-                  <a16:creationId xmlns:a16="http://schemas.microsoft.com/office/drawing/2014/main" id="{D72FD3C7-F3DA-FC74-C50E-506AB5C829B9}"/>
+                  <a16:creationId xmlns:a16="http://schemas.microsoft.com/office/drawing/2014/main" id="{28255B2D-61CC-B17A-278D-2E2AE788922C}"/>
                 </a:ext>
               </a:extLst>
             </p:cNvPr>
@@ -11145,18 +11707,12 @@
           </p:nvSpPr>
           <p:spPr>
             <a:xfrm>
-              <a:off x="873303" y="2547991"/>
-              <a:ext cx="3904180" cy="308225"/>
+              <a:off x="5424755" y="3318553"/>
+              <a:ext cx="1150706" cy="801384"/>
             </a:xfrm>
-            <a:prstGeom prst="rect">
+            <a:prstGeom prst="downArrow">
               <a:avLst/>
             </a:prstGeom>
-            <a:solidFill>
-              <a:schemeClr val="bg1"/>
-            </a:solidFill>
-            <a:ln>
-              <a:noFill/>
-            </a:ln>
           </p:spPr>
           <p:style>
             <a:lnRef idx="2">
@@ -11186,10 +11742,10 @@
       </p:grpSp>
       <p:sp>
         <p:nvSpPr>
-          <p:cNvPr id="28" name="矢印: 下 27">
-            <a:extLst>
-              <a:ext uri="{FF2B5EF4-FFF2-40B4-BE49-F238E27FC236}">
-                <a16:creationId xmlns:a16="http://schemas.microsoft.com/office/drawing/2014/main" id="{28255B2D-61CC-B17A-278D-2E2AE788922C}"/>
+          <p:cNvPr id="5" name="正方形/長方形 4">
+            <a:extLst>
+              <a:ext uri="{FF2B5EF4-FFF2-40B4-BE49-F238E27FC236}">
+                <a16:creationId xmlns:a16="http://schemas.microsoft.com/office/drawing/2014/main" id="{58D40B80-BEE2-ED9D-05B3-7CA097FFC8D1}"/>
               </a:ext>
             </a:extLst>
           </p:cNvPr>
@@ -11198,12 +11754,382 @@
         </p:nvSpPr>
         <p:spPr>
           <a:xfrm>
-            <a:off x="5424755" y="3318553"/>
-            <a:ext cx="1150706" cy="801384"/>
-          </a:xfrm>
-          <a:prstGeom prst="downArrow">
+            <a:off x="1777428" y="1674689"/>
+            <a:ext cx="760287" cy="123290"/>
+          </a:xfrm>
+          <a:prstGeom prst="rect">
             <a:avLst/>
           </a:prstGeom>
+          <a:solidFill>
+            <a:schemeClr val="bg1"/>
+          </a:solidFill>
+          <a:ln>
+            <a:noFill/>
+          </a:ln>
+        </p:spPr>
+        <p:style>
+          <a:lnRef idx="2">
+            <a:schemeClr val="accent1">
+              <a:shade val="15000"/>
+            </a:schemeClr>
+          </a:lnRef>
+          <a:fillRef idx="1">
+            <a:schemeClr val="accent1"/>
+          </a:fillRef>
+          <a:effectRef idx="0">
+            <a:schemeClr val="accent1"/>
+          </a:effectRef>
+          <a:fontRef idx="minor">
+            <a:schemeClr val="lt1"/>
+          </a:fontRef>
+        </p:style>
+        <p:txBody>
+          <a:bodyPr rtlCol="0" anchor="ctr"/>
+          <a:lstStyle/>
+          <a:p>
+            <a:pPr algn="ctr"/>
+            <a:endParaRPr kumimoji="1" lang="ja-JP" altLang="en-US"/>
+          </a:p>
+        </p:txBody>
+      </p:sp>
+      <p:sp>
+        <p:nvSpPr>
+          <p:cNvPr id="7" name="正方形/長方形 6">
+            <a:extLst>
+              <a:ext uri="{FF2B5EF4-FFF2-40B4-BE49-F238E27FC236}">
+                <a16:creationId xmlns:a16="http://schemas.microsoft.com/office/drawing/2014/main" id="{FB793D9B-005C-83F1-9EFC-6DCFD5B2735F}"/>
+              </a:ext>
+            </a:extLst>
+          </p:cNvPr>
+          <p:cNvSpPr/>
+          <p:nvPr/>
+        </p:nvSpPr>
+        <p:spPr>
+          <a:xfrm>
+            <a:off x="1941815" y="4869951"/>
+            <a:ext cx="760287" cy="123290"/>
+          </a:xfrm>
+          <a:prstGeom prst="rect">
+            <a:avLst/>
+          </a:prstGeom>
+          <a:solidFill>
+            <a:schemeClr val="bg1"/>
+          </a:solidFill>
+          <a:ln>
+            <a:noFill/>
+          </a:ln>
+        </p:spPr>
+        <p:style>
+          <a:lnRef idx="2">
+            <a:schemeClr val="accent1">
+              <a:shade val="15000"/>
+            </a:schemeClr>
+          </a:lnRef>
+          <a:fillRef idx="1">
+            <a:schemeClr val="accent1"/>
+          </a:fillRef>
+          <a:effectRef idx="0">
+            <a:schemeClr val="accent1"/>
+          </a:effectRef>
+          <a:fontRef idx="minor">
+            <a:schemeClr val="lt1"/>
+          </a:fontRef>
+        </p:style>
+        <p:txBody>
+          <a:bodyPr rtlCol="0" anchor="ctr"/>
+          <a:lstStyle/>
+          <a:p>
+            <a:pPr algn="ctr"/>
+            <a:endParaRPr kumimoji="1" lang="ja-JP" altLang="en-US"/>
+          </a:p>
+        </p:txBody>
+      </p:sp>
+      <p:sp>
+        <p:nvSpPr>
+          <p:cNvPr id="9" name="正方形/長方形 8">
+            <a:extLst>
+              <a:ext uri="{FF2B5EF4-FFF2-40B4-BE49-F238E27FC236}">
+                <a16:creationId xmlns:a16="http://schemas.microsoft.com/office/drawing/2014/main" id="{1AEFF016-E709-BA0C-B326-8FB3B8E034EA}"/>
+              </a:ext>
+            </a:extLst>
+          </p:cNvPr>
+          <p:cNvSpPr/>
+          <p:nvPr/>
+        </p:nvSpPr>
+        <p:spPr>
+          <a:xfrm>
+            <a:off x="1796264" y="2032572"/>
+            <a:ext cx="760287" cy="123290"/>
+          </a:xfrm>
+          <a:prstGeom prst="rect">
+            <a:avLst/>
+          </a:prstGeom>
+          <a:solidFill>
+            <a:schemeClr val="bg1"/>
+          </a:solidFill>
+          <a:ln>
+            <a:noFill/>
+          </a:ln>
+        </p:spPr>
+        <p:style>
+          <a:lnRef idx="2">
+            <a:schemeClr val="accent1">
+              <a:shade val="15000"/>
+            </a:schemeClr>
+          </a:lnRef>
+          <a:fillRef idx="1">
+            <a:schemeClr val="accent1"/>
+          </a:fillRef>
+          <a:effectRef idx="0">
+            <a:schemeClr val="accent1"/>
+          </a:effectRef>
+          <a:fontRef idx="minor">
+            <a:schemeClr val="lt1"/>
+          </a:fontRef>
+        </p:style>
+        <p:txBody>
+          <a:bodyPr rtlCol="0" anchor="ctr"/>
+          <a:lstStyle/>
+          <a:p>
+            <a:pPr algn="ctr"/>
+            <a:endParaRPr kumimoji="1" lang="ja-JP" altLang="en-US"/>
+          </a:p>
+        </p:txBody>
+      </p:sp>
+      <p:sp>
+        <p:nvSpPr>
+          <p:cNvPr id="11" name="正方形/長方形 10">
+            <a:extLst>
+              <a:ext uri="{FF2B5EF4-FFF2-40B4-BE49-F238E27FC236}">
+                <a16:creationId xmlns:a16="http://schemas.microsoft.com/office/drawing/2014/main" id="{3CDC1ADE-BD45-A343-EB40-3840FCD8126B}"/>
+              </a:ext>
+            </a:extLst>
+          </p:cNvPr>
+          <p:cNvSpPr/>
+          <p:nvPr/>
+        </p:nvSpPr>
+        <p:spPr>
+          <a:xfrm>
+            <a:off x="1755168" y="2464086"/>
+            <a:ext cx="760287" cy="123290"/>
+          </a:xfrm>
+          <a:prstGeom prst="rect">
+            <a:avLst/>
+          </a:prstGeom>
+          <a:solidFill>
+            <a:schemeClr val="bg1"/>
+          </a:solidFill>
+          <a:ln>
+            <a:noFill/>
+          </a:ln>
+        </p:spPr>
+        <p:style>
+          <a:lnRef idx="2">
+            <a:schemeClr val="accent1">
+              <a:shade val="15000"/>
+            </a:schemeClr>
+          </a:lnRef>
+          <a:fillRef idx="1">
+            <a:schemeClr val="accent1"/>
+          </a:fillRef>
+          <a:effectRef idx="0">
+            <a:schemeClr val="accent1"/>
+          </a:effectRef>
+          <a:fontRef idx="minor">
+            <a:schemeClr val="lt1"/>
+          </a:fontRef>
+        </p:style>
+        <p:txBody>
+          <a:bodyPr rtlCol="0" anchor="ctr"/>
+          <a:lstStyle/>
+          <a:p>
+            <a:pPr algn="ctr"/>
+            <a:endParaRPr kumimoji="1" lang="ja-JP" altLang="en-US"/>
+          </a:p>
+        </p:txBody>
+      </p:sp>
+      <p:sp>
+        <p:nvSpPr>
+          <p:cNvPr id="13" name="正方形/長方形 12">
+            <a:extLst>
+              <a:ext uri="{FF2B5EF4-FFF2-40B4-BE49-F238E27FC236}">
+                <a16:creationId xmlns:a16="http://schemas.microsoft.com/office/drawing/2014/main" id="{8864F213-D6C3-B990-723A-B5228CFF9B9E}"/>
+              </a:ext>
+            </a:extLst>
+          </p:cNvPr>
+          <p:cNvSpPr/>
+          <p:nvPr/>
+        </p:nvSpPr>
+        <p:spPr>
+          <a:xfrm>
+            <a:off x="5998394" y="1662702"/>
+            <a:ext cx="1018855" cy="114727"/>
+          </a:xfrm>
+          <a:prstGeom prst="rect">
+            <a:avLst/>
+          </a:prstGeom>
+          <a:solidFill>
+            <a:schemeClr val="bg1"/>
+          </a:solidFill>
+          <a:ln>
+            <a:noFill/>
+          </a:ln>
+        </p:spPr>
+        <p:style>
+          <a:lnRef idx="2">
+            <a:schemeClr val="accent1">
+              <a:shade val="15000"/>
+            </a:schemeClr>
+          </a:lnRef>
+          <a:fillRef idx="1">
+            <a:schemeClr val="accent1"/>
+          </a:fillRef>
+          <a:effectRef idx="0">
+            <a:schemeClr val="accent1"/>
+          </a:effectRef>
+          <a:fontRef idx="minor">
+            <a:schemeClr val="lt1"/>
+          </a:fontRef>
+        </p:style>
+        <p:txBody>
+          <a:bodyPr rtlCol="0" anchor="ctr"/>
+          <a:lstStyle/>
+          <a:p>
+            <a:pPr algn="ctr"/>
+            <a:endParaRPr kumimoji="1" lang="ja-JP" altLang="en-US"/>
+          </a:p>
+        </p:txBody>
+      </p:sp>
+      <p:sp>
+        <p:nvSpPr>
+          <p:cNvPr id="15" name="正方形/長方形 14">
+            <a:extLst>
+              <a:ext uri="{FF2B5EF4-FFF2-40B4-BE49-F238E27FC236}">
+                <a16:creationId xmlns:a16="http://schemas.microsoft.com/office/drawing/2014/main" id="{5FC6005D-73A7-AE05-94AC-1D051E37439F}"/>
+              </a:ext>
+            </a:extLst>
+          </p:cNvPr>
+          <p:cNvSpPr/>
+          <p:nvPr/>
+        </p:nvSpPr>
+        <p:spPr>
+          <a:xfrm>
+            <a:off x="6008669" y="2053119"/>
+            <a:ext cx="1666127" cy="125001"/>
+          </a:xfrm>
+          <a:prstGeom prst="rect">
+            <a:avLst/>
+          </a:prstGeom>
+          <a:solidFill>
+            <a:schemeClr val="bg1"/>
+          </a:solidFill>
+          <a:ln>
+            <a:noFill/>
+          </a:ln>
+        </p:spPr>
+        <p:style>
+          <a:lnRef idx="2">
+            <a:schemeClr val="accent1">
+              <a:shade val="15000"/>
+            </a:schemeClr>
+          </a:lnRef>
+          <a:fillRef idx="1">
+            <a:schemeClr val="accent1"/>
+          </a:fillRef>
+          <a:effectRef idx="0">
+            <a:schemeClr val="accent1"/>
+          </a:effectRef>
+          <a:fontRef idx="minor">
+            <a:schemeClr val="lt1"/>
+          </a:fontRef>
+        </p:style>
+        <p:txBody>
+          <a:bodyPr rtlCol="0" anchor="ctr"/>
+          <a:lstStyle/>
+          <a:p>
+            <a:pPr algn="ctr"/>
+            <a:endParaRPr kumimoji="1" lang="ja-JP" altLang="en-US"/>
+          </a:p>
+        </p:txBody>
+      </p:sp>
+      <p:sp>
+        <p:nvSpPr>
+          <p:cNvPr id="17" name="正方形/長方形 16">
+            <a:extLst>
+              <a:ext uri="{FF2B5EF4-FFF2-40B4-BE49-F238E27FC236}">
+                <a16:creationId xmlns:a16="http://schemas.microsoft.com/office/drawing/2014/main" id="{41A150BA-6876-BE29-0450-D0554D183CEB}"/>
+              </a:ext>
+            </a:extLst>
+          </p:cNvPr>
+          <p:cNvSpPr/>
+          <p:nvPr/>
+        </p:nvSpPr>
+        <p:spPr>
+          <a:xfrm>
+            <a:off x="5988121" y="2412716"/>
+            <a:ext cx="760287" cy="123290"/>
+          </a:xfrm>
+          <a:prstGeom prst="rect">
+            <a:avLst/>
+          </a:prstGeom>
+          <a:solidFill>
+            <a:schemeClr val="bg1"/>
+          </a:solidFill>
+          <a:ln>
+            <a:noFill/>
+          </a:ln>
+        </p:spPr>
+        <p:style>
+          <a:lnRef idx="2">
+            <a:schemeClr val="accent1">
+              <a:shade val="15000"/>
+            </a:schemeClr>
+          </a:lnRef>
+          <a:fillRef idx="1">
+            <a:schemeClr val="accent1"/>
+          </a:fillRef>
+          <a:effectRef idx="0">
+            <a:schemeClr val="accent1"/>
+          </a:effectRef>
+          <a:fontRef idx="minor">
+            <a:schemeClr val="lt1"/>
+          </a:fontRef>
+        </p:style>
+        <p:txBody>
+          <a:bodyPr rtlCol="0" anchor="ctr"/>
+          <a:lstStyle/>
+          <a:p>
+            <a:pPr algn="ctr"/>
+            <a:endParaRPr kumimoji="1" lang="ja-JP" altLang="en-US"/>
+          </a:p>
+        </p:txBody>
+      </p:sp>
+      <p:sp>
+        <p:nvSpPr>
+          <p:cNvPr id="23" name="正方形/長方形 22">
+            <a:extLst>
+              <a:ext uri="{FF2B5EF4-FFF2-40B4-BE49-F238E27FC236}">
+                <a16:creationId xmlns:a16="http://schemas.microsoft.com/office/drawing/2014/main" id="{4F460C0F-12AC-58B7-4C56-92F89E11BAE0}"/>
+              </a:ext>
+            </a:extLst>
+          </p:cNvPr>
+          <p:cNvSpPr/>
+          <p:nvPr/>
+        </p:nvSpPr>
+        <p:spPr>
+          <a:xfrm>
+            <a:off x="8114871" y="2402441"/>
+            <a:ext cx="760287" cy="123290"/>
+          </a:xfrm>
+          <a:prstGeom prst="rect">
+            <a:avLst/>
+          </a:prstGeom>
+          <a:solidFill>
+            <a:schemeClr val="bg1"/>
+          </a:solidFill>
+          <a:ln>
+            <a:noFill/>
+          </a:ln>
         </p:spPr>
         <p:style>
           <a:lnRef idx="2">
@@ -11321,160 +12247,181 @@
           </a:p>
         </p:txBody>
       </p:sp>
-      <p:pic>
-        <p:nvPicPr>
-          <p:cNvPr id="17" name="図 16">
-            <a:extLst>
-              <a:ext uri="{FF2B5EF4-FFF2-40B4-BE49-F238E27FC236}">
-                <a16:creationId xmlns:a16="http://schemas.microsoft.com/office/drawing/2014/main" id="{39AEC700-1252-E878-7221-4DC6E3AB5D63}"/>
-              </a:ext>
-            </a:extLst>
-          </p:cNvPr>
-          <p:cNvPicPr>
-            <a:picLocks noChangeAspect="1"/>
-          </p:cNvPicPr>
+      <p:grpSp>
+        <p:nvGrpSpPr>
+          <p:cNvPr id="2" name="グループ化 1">
+            <a:extLst>
+              <a:ext uri="{FF2B5EF4-FFF2-40B4-BE49-F238E27FC236}">
+                <a16:creationId xmlns:a16="http://schemas.microsoft.com/office/drawing/2014/main" id="{2201ABE2-0DE0-0DA8-59B4-F8626DD5814A}"/>
+              </a:ext>
+            </a:extLst>
+          </p:cNvPr>
+          <p:cNvGrpSpPr/>
           <p:nvPr/>
-        </p:nvPicPr>
-        <p:blipFill>
-          <a:blip r:embed="rId2"/>
-          <a:stretch>
-            <a:fillRect/>
-          </a:stretch>
-        </p:blipFill>
-        <p:spPr>
+        </p:nvGrpSpPr>
+        <p:grpSpPr>
           <a:xfrm>
             <a:off x="427513" y="400275"/>
-            <a:ext cx="5141080" cy="6291908"/>
-          </a:xfrm>
-          <a:prstGeom prst="rect">
-            <a:avLst/>
-          </a:prstGeom>
-        </p:spPr>
-      </p:pic>
-      <p:sp>
-        <p:nvSpPr>
-          <p:cNvPr id="9" name="吹き出し: 角を丸めた四角形 8">
-            <a:extLst>
-              <a:ext uri="{FF2B5EF4-FFF2-40B4-BE49-F238E27FC236}">
-                <a16:creationId xmlns:a16="http://schemas.microsoft.com/office/drawing/2014/main" id="{F3E54927-7D64-5D91-627C-ACCA33205F1A}"/>
-              </a:ext>
-            </a:extLst>
-          </p:cNvPr>
-          <p:cNvSpPr/>
-          <p:nvPr/>
-        </p:nvSpPr>
-        <p:spPr>
-          <a:xfrm>
-            <a:off x="6051479" y="431516"/>
-            <a:ext cx="6010382" cy="3359648"/>
-          </a:xfrm>
-          <a:prstGeom prst="wedgeRoundRectCallout">
-            <a:avLst>
-              <a:gd name="adj1" fmla="val -62785"/>
-              <a:gd name="adj2" fmla="val -21966"/>
-              <a:gd name="adj3" fmla="val 16667"/>
-            </a:avLst>
-          </a:prstGeom>
-          <a:noFill/>
-          <a:ln w="28575">
-            <a:solidFill>
+            <a:ext cx="11634348" cy="6291908"/>
+            <a:chOff x="427513" y="400275"/>
+            <a:chExt cx="11634348" cy="6291908"/>
+          </a:xfrm>
+        </p:grpSpPr>
+        <p:pic>
+          <p:nvPicPr>
+            <p:cNvPr id="17" name="図 16">
+              <a:extLst>
+                <a:ext uri="{FF2B5EF4-FFF2-40B4-BE49-F238E27FC236}">
+                  <a16:creationId xmlns:a16="http://schemas.microsoft.com/office/drawing/2014/main" id="{39AEC700-1252-E878-7221-4DC6E3AB5D63}"/>
+                </a:ext>
+              </a:extLst>
+            </p:cNvPr>
+            <p:cNvPicPr>
+              <a:picLocks noChangeAspect="1"/>
+            </p:cNvPicPr>
+            <p:nvPr/>
+          </p:nvPicPr>
+          <p:blipFill>
+            <a:blip r:embed="rId2"/>
+            <a:stretch>
+              <a:fillRect/>
+            </a:stretch>
+          </p:blipFill>
+          <p:spPr>
+            <a:xfrm>
+              <a:off x="427513" y="400275"/>
+              <a:ext cx="5141080" cy="6291908"/>
+            </a:xfrm>
+            <a:prstGeom prst="rect">
+              <a:avLst/>
+            </a:prstGeom>
+          </p:spPr>
+        </p:pic>
+        <p:sp>
+          <p:nvSpPr>
+            <p:cNvPr id="9" name="吹き出し: 角を丸めた四角形 8">
+              <a:extLst>
+                <a:ext uri="{FF2B5EF4-FFF2-40B4-BE49-F238E27FC236}">
+                  <a16:creationId xmlns:a16="http://schemas.microsoft.com/office/drawing/2014/main" id="{F3E54927-7D64-5D91-627C-ACCA33205F1A}"/>
+                </a:ext>
+              </a:extLst>
+            </p:cNvPr>
+            <p:cNvSpPr/>
+            <p:nvPr/>
+          </p:nvSpPr>
+          <p:spPr>
+            <a:xfrm>
+              <a:off x="6051479" y="431516"/>
+              <a:ext cx="6010382" cy="3359648"/>
+            </a:xfrm>
+            <a:prstGeom prst="wedgeRoundRectCallout">
+              <a:avLst>
+                <a:gd name="adj1" fmla="val -62785"/>
+                <a:gd name="adj2" fmla="val -21966"/>
+                <a:gd name="adj3" fmla="val 16667"/>
+              </a:avLst>
+            </a:prstGeom>
+            <a:noFill/>
+            <a:ln w="28575">
+              <a:solidFill>
+                <a:schemeClr val="accent1"/>
+              </a:solidFill>
+            </a:ln>
+          </p:spPr>
+          <p:style>
+            <a:lnRef idx="2">
+              <a:schemeClr val="accent1">
+                <a:shade val="15000"/>
+              </a:schemeClr>
+            </a:lnRef>
+            <a:fillRef idx="1">
               <a:schemeClr val="accent1"/>
-            </a:solidFill>
-          </a:ln>
-        </p:spPr>
-        <p:style>
-          <a:lnRef idx="2">
-            <a:schemeClr val="accent1">
-              <a:shade val="15000"/>
-            </a:schemeClr>
-          </a:lnRef>
-          <a:fillRef idx="1">
-            <a:schemeClr val="accent1"/>
-          </a:fillRef>
-          <a:effectRef idx="0">
-            <a:schemeClr val="accent1"/>
-          </a:effectRef>
-          <a:fontRef idx="minor">
-            <a:schemeClr val="lt1"/>
-          </a:fontRef>
-        </p:style>
-        <p:txBody>
-          <a:bodyPr rtlCol="0" anchor="ctr"/>
-          <a:lstStyle/>
-          <a:p>
-            <a:r>
-              <a:rPr kumimoji="1" lang="ja-JP" altLang="en-US" sz="3200" dirty="0">
+            </a:fillRef>
+            <a:effectRef idx="0">
+              <a:schemeClr val="accent1"/>
+            </a:effectRef>
+            <a:fontRef idx="minor">
+              <a:schemeClr val="lt1"/>
+            </a:fontRef>
+          </p:style>
+          <p:txBody>
+            <a:bodyPr rtlCol="0" anchor="ctr"/>
+            <a:lstStyle/>
+            <a:p>
+              <a:r>
+                <a:rPr kumimoji="1" lang="ja-JP" altLang="en-US" sz="3200" dirty="0">
+                  <a:solidFill>
+                    <a:schemeClr val="tx1"/>
+                  </a:solidFill>
+                  <a:latin typeface="HGP創英角ﾎﾟｯﾌﾟ体" panose="040B0A00000000000000" pitchFamily="50" charset="-128"/>
+                  <a:ea typeface="HGP創英角ﾎﾟｯﾌﾟ体" panose="040B0A00000000000000" pitchFamily="50" charset="-128"/>
+                </a:rPr>
+                <a:t>面接状況を</a:t>
+              </a:r>
+              <a:endParaRPr kumimoji="1" lang="en-US" altLang="ja-JP" sz="3200" dirty="0">
                 <a:solidFill>
                   <a:schemeClr val="tx1"/>
                 </a:solidFill>
                 <a:latin typeface="HGP創英角ﾎﾟｯﾌﾟ体" panose="040B0A00000000000000" pitchFamily="50" charset="-128"/>
                 <a:ea typeface="HGP創英角ﾎﾟｯﾌﾟ体" panose="040B0A00000000000000" pitchFamily="50" charset="-128"/>
-              </a:rPr>
-              <a:t>面接状況を</a:t>
-            </a:r>
-            <a:endParaRPr kumimoji="1" lang="en-US" altLang="ja-JP" sz="3200" dirty="0">
-              <a:solidFill>
-                <a:schemeClr val="tx1"/>
-              </a:solidFill>
-              <a:latin typeface="HGP創英角ﾎﾟｯﾌﾟ体" panose="040B0A00000000000000" pitchFamily="50" charset="-128"/>
-              <a:ea typeface="HGP創英角ﾎﾟｯﾌﾟ体" panose="040B0A00000000000000" pitchFamily="50" charset="-128"/>
-            </a:endParaRPr>
-          </a:p>
-          <a:p>
-            <a:r>
-              <a:rPr kumimoji="1" lang="ja-JP" altLang="en-US" sz="3200" dirty="0">
+              </a:endParaRPr>
+            </a:p>
+            <a:p>
+              <a:r>
+                <a:rPr kumimoji="1" lang="ja-JP" altLang="en-US" sz="3200" dirty="0">
+                  <a:solidFill>
+                    <a:schemeClr val="tx1"/>
+                  </a:solidFill>
+                  <a:latin typeface="HGP創英角ﾎﾟｯﾌﾟ体" panose="040B0A00000000000000" pitchFamily="50" charset="-128"/>
+                  <a:ea typeface="HGP創英角ﾎﾟｯﾌﾟ体" panose="040B0A00000000000000" pitchFamily="50" charset="-128"/>
+                </a:rPr>
+                <a:t>カレンダーへ反映することで</a:t>
+              </a:r>
+              <a:endParaRPr kumimoji="1" lang="en-US" altLang="ja-JP" sz="3200" dirty="0">
                 <a:solidFill>
                   <a:schemeClr val="tx1"/>
                 </a:solidFill>
                 <a:latin typeface="HGP創英角ﾎﾟｯﾌﾟ体" panose="040B0A00000000000000" pitchFamily="50" charset="-128"/>
                 <a:ea typeface="HGP創英角ﾎﾟｯﾌﾟ体" panose="040B0A00000000000000" pitchFamily="50" charset="-128"/>
-              </a:rPr>
-              <a:t>カレンダーへ反映することで</a:t>
-            </a:r>
-            <a:endParaRPr kumimoji="1" lang="en-US" altLang="ja-JP" sz="3200" dirty="0">
-              <a:solidFill>
-                <a:schemeClr val="tx1"/>
-              </a:solidFill>
-              <a:latin typeface="HGP創英角ﾎﾟｯﾌﾟ体" panose="040B0A00000000000000" pitchFamily="50" charset="-128"/>
-              <a:ea typeface="HGP創英角ﾎﾟｯﾌﾟ体" panose="040B0A00000000000000" pitchFamily="50" charset="-128"/>
-            </a:endParaRPr>
-          </a:p>
-          <a:p>
-            <a:r>
-              <a:rPr kumimoji="1" lang="ja-JP" altLang="en-US" sz="3200" dirty="0">
+              </a:endParaRPr>
+            </a:p>
+            <a:p>
+              <a:r>
+                <a:rPr kumimoji="1" lang="ja-JP" altLang="en-US" sz="3200" dirty="0">
+                  <a:solidFill>
+                    <a:schemeClr val="tx1"/>
+                  </a:solidFill>
+                  <a:latin typeface="HGP創英角ﾎﾟｯﾌﾟ体" panose="040B0A00000000000000" pitchFamily="50" charset="-128"/>
+                  <a:ea typeface="HGP創英角ﾎﾟｯﾌﾟ体" panose="040B0A00000000000000" pitchFamily="50" charset="-128"/>
+                </a:rPr>
+                <a:t>予定が見やすく、</a:t>
+              </a:r>
+              <a:endParaRPr kumimoji="1" lang="en-US" altLang="ja-JP" sz="3200" dirty="0">
                 <a:solidFill>
                   <a:schemeClr val="tx1"/>
                 </a:solidFill>
                 <a:latin typeface="HGP創英角ﾎﾟｯﾌﾟ体" panose="040B0A00000000000000" pitchFamily="50" charset="-128"/>
                 <a:ea typeface="HGP創英角ﾎﾟｯﾌﾟ体" panose="040B0A00000000000000" pitchFamily="50" charset="-128"/>
-              </a:rPr>
-              <a:t>予定が見やすく、</a:t>
-            </a:r>
-            <a:endParaRPr kumimoji="1" lang="en-US" altLang="ja-JP" sz="3200" dirty="0">
-              <a:solidFill>
-                <a:schemeClr val="tx1"/>
-              </a:solidFill>
-              <a:latin typeface="HGP創英角ﾎﾟｯﾌﾟ体" panose="040B0A00000000000000" pitchFamily="50" charset="-128"/>
-              <a:ea typeface="HGP創英角ﾎﾟｯﾌﾟ体" panose="040B0A00000000000000" pitchFamily="50" charset="-128"/>
-            </a:endParaRPr>
-          </a:p>
-          <a:p>
-            <a:r>
-              <a:rPr kumimoji="1" lang="ja-JP" altLang="en-US" sz="3200" dirty="0">
-                <a:solidFill>
-                  <a:schemeClr val="tx1"/>
-                </a:solidFill>
-                <a:latin typeface="HGP創英角ﾎﾟｯﾌﾟ体" panose="040B0A00000000000000" pitchFamily="50" charset="-128"/>
-                <a:ea typeface="HGP創英角ﾎﾟｯﾌﾟ体" panose="040B0A00000000000000" pitchFamily="50" charset="-128"/>
-              </a:rPr>
-              <a:t>面接設定自体もしやすくなる！</a:t>
-            </a:r>
-          </a:p>
-          <a:p>
-            <a:endParaRPr kumimoji="1" lang="ja-JP" altLang="en-US" dirty="0"/>
-          </a:p>
-        </p:txBody>
-      </p:sp>
+              </a:endParaRPr>
+            </a:p>
+            <a:p>
+              <a:r>
+                <a:rPr kumimoji="1" lang="ja-JP" altLang="en-US" sz="3200" dirty="0">
+                  <a:solidFill>
+                    <a:schemeClr val="tx1"/>
+                  </a:solidFill>
+                  <a:latin typeface="HGP創英角ﾎﾟｯﾌﾟ体" panose="040B0A00000000000000" pitchFamily="50" charset="-128"/>
+                  <a:ea typeface="HGP創英角ﾎﾟｯﾌﾟ体" panose="040B0A00000000000000" pitchFamily="50" charset="-128"/>
+                </a:rPr>
+                <a:t>面接設定自体もしやすくなる！</a:t>
+              </a:r>
+            </a:p>
+            <a:p>
+              <a:endParaRPr kumimoji="1" lang="ja-JP" altLang="en-US" dirty="0"/>
+            </a:p>
+          </p:txBody>
+        </p:sp>
+      </p:grpSp>
       <p:pic>
         <p:nvPicPr>
           <p:cNvPr id="18" name="図 17" descr="面接マナーをわかりやすく解説！入室前から退室後までの注意点をイラストでご紹介 | なるほど！ジョブメドレー">

--- a/採用管理システム.pptx
+++ b/採用管理システム.pptx
@@ -6,10 +6,11 @@
   </p:sldMasterIdLst>
   <p:sldIdLst>
     <p:sldId id="256" r:id="rId2"/>
-    <p:sldId id="257" r:id="rId3"/>
-    <p:sldId id="258" r:id="rId4"/>
-    <p:sldId id="259" r:id="rId5"/>
-    <p:sldId id="260" r:id="rId6"/>
+    <p:sldId id="261" r:id="rId3"/>
+    <p:sldId id="257" r:id="rId4"/>
+    <p:sldId id="258" r:id="rId5"/>
+    <p:sldId id="259" r:id="rId6"/>
+    <p:sldId id="260" r:id="rId7"/>
   </p:sldIdLst>
   <p:sldSz cx="12192000" cy="6858000"/>
   <p:notesSz cx="6858000" cy="9144000"/>
@@ -10436,6 +10437,460 @@
 <file path=ppt/slides/slide2.xml><?xml version="1.0" encoding="utf-8"?>
 <p:sld xmlns:a="http://schemas.openxmlformats.org/drawingml/2006/main" xmlns:r="http://schemas.openxmlformats.org/officeDocument/2006/relationships" xmlns:p="http://schemas.openxmlformats.org/presentationml/2006/main">
   <p:cSld>
+    <p:bg>
+      <p:bgPr>
+        <a:solidFill>
+          <a:schemeClr val="tx1"/>
+        </a:solidFill>
+        <a:effectLst/>
+      </p:bgPr>
+    </p:bg>
+    <p:spTree>
+      <p:nvGrpSpPr>
+        <p:cNvPr id="1" name="">
+          <a:extLst>
+            <a:ext uri="{FF2B5EF4-FFF2-40B4-BE49-F238E27FC236}">
+              <a16:creationId xmlns:a16="http://schemas.microsoft.com/office/drawing/2014/main" id="{55CE0243-5D54-B0D4-A614-3B89D2D46DBB}"/>
+            </a:ext>
+          </a:extLst>
+        </p:cNvPr>
+        <p:cNvGrpSpPr/>
+        <p:nvPr/>
+      </p:nvGrpSpPr>
+      <p:grpSpPr>
+        <a:xfrm>
+          <a:off x="0" y="0"/>
+          <a:ext cx="0" cy="0"/>
+          <a:chOff x="0" y="0"/>
+          <a:chExt cx="0" cy="0"/>
+        </a:xfrm>
+      </p:grpSpPr>
+      <p:sp>
+        <p:nvSpPr>
+          <p:cNvPr id="4" name="正方形/長方形 3">
+            <a:extLst>
+              <a:ext uri="{FF2B5EF4-FFF2-40B4-BE49-F238E27FC236}">
+                <a16:creationId xmlns:a16="http://schemas.microsoft.com/office/drawing/2014/main" id="{AAC1827D-7BCF-9208-8395-B69FA80EF557}"/>
+              </a:ext>
+            </a:extLst>
+          </p:cNvPr>
+          <p:cNvSpPr/>
+          <p:nvPr/>
+        </p:nvSpPr>
+        <p:spPr>
+          <a:xfrm>
+            <a:off x="71919" y="174660"/>
+            <a:ext cx="10931703" cy="1756881"/>
+          </a:xfrm>
+          <a:prstGeom prst="rect">
+            <a:avLst/>
+          </a:prstGeom>
+          <a:noFill/>
+          <a:ln>
+            <a:noFill/>
+          </a:ln>
+        </p:spPr>
+        <p:style>
+          <a:lnRef idx="2">
+            <a:schemeClr val="accent1">
+              <a:shade val="15000"/>
+            </a:schemeClr>
+          </a:lnRef>
+          <a:fillRef idx="1">
+            <a:schemeClr val="accent1"/>
+          </a:fillRef>
+          <a:effectRef idx="0">
+            <a:schemeClr val="accent1"/>
+          </a:effectRef>
+          <a:fontRef idx="minor">
+            <a:schemeClr val="lt1"/>
+          </a:fontRef>
+        </p:style>
+        <p:txBody>
+          <a:bodyPr rtlCol="0" anchor="ctr"/>
+          <a:lstStyle/>
+          <a:p>
+            <a:pPr algn="ctr"/>
+            <a:r>
+              <a:rPr kumimoji="1" lang="ja-JP" altLang="en-US" sz="5400" dirty="0">
+                <a:solidFill>
+                  <a:srgbClr val="0070C0"/>
+                </a:solidFill>
+                <a:latin typeface="HGP創英角ﾎﾟｯﾌﾟ体" panose="040B0A00000000000000" pitchFamily="50" charset="-128"/>
+                <a:ea typeface="HGP創英角ﾎﾟｯﾌﾟ体" panose="040B0A00000000000000" pitchFamily="50" charset="-128"/>
+              </a:rPr>
+              <a:t>採用管理システム</a:t>
+            </a:r>
+            <a:r>
+              <a:rPr kumimoji="1" lang="ja-JP" altLang="en-US" sz="3200" dirty="0">
+                <a:solidFill>
+                  <a:srgbClr val="0070C0"/>
+                </a:solidFill>
+                <a:latin typeface="HGP創英角ﾎﾟｯﾌﾟ体" panose="040B0A00000000000000" pitchFamily="50" charset="-128"/>
+                <a:ea typeface="HGP創英角ﾎﾟｯﾌﾟ体" panose="040B0A00000000000000" pitchFamily="50" charset="-128"/>
+              </a:rPr>
+              <a:t>を作ろうと思った経緯。。。</a:t>
+            </a:r>
+            <a:endParaRPr kumimoji="1" lang="ja-JP" altLang="en-US" sz="5400" dirty="0">
+              <a:solidFill>
+                <a:srgbClr val="0070C0"/>
+              </a:solidFill>
+              <a:latin typeface="HGP創英角ﾎﾟｯﾌﾟ体" panose="040B0A00000000000000" pitchFamily="50" charset="-128"/>
+              <a:ea typeface="HGP創英角ﾎﾟｯﾌﾟ体" panose="040B0A00000000000000" pitchFamily="50" charset="-128"/>
+            </a:endParaRPr>
+          </a:p>
+        </p:txBody>
+      </p:sp>
+      <p:sp>
+        <p:nvSpPr>
+          <p:cNvPr id="3" name="正方形/長方形 2">
+            <a:extLst>
+              <a:ext uri="{FF2B5EF4-FFF2-40B4-BE49-F238E27FC236}">
+                <a16:creationId xmlns:a16="http://schemas.microsoft.com/office/drawing/2014/main" id="{8571A34C-277C-6945-E93B-9A59C9D96EE4}"/>
+              </a:ext>
+            </a:extLst>
+          </p:cNvPr>
+          <p:cNvSpPr/>
+          <p:nvPr/>
+        </p:nvSpPr>
+        <p:spPr>
+          <a:xfrm>
+            <a:off x="791109" y="1417833"/>
+            <a:ext cx="10931703" cy="5044612"/>
+          </a:xfrm>
+          <a:prstGeom prst="rect">
+            <a:avLst/>
+          </a:prstGeom>
+          <a:noFill/>
+          <a:ln>
+            <a:noFill/>
+          </a:ln>
+        </p:spPr>
+        <p:style>
+          <a:lnRef idx="2">
+            <a:schemeClr val="accent1">
+              <a:shade val="15000"/>
+            </a:schemeClr>
+          </a:lnRef>
+          <a:fillRef idx="1">
+            <a:schemeClr val="accent1"/>
+          </a:fillRef>
+          <a:effectRef idx="0">
+            <a:schemeClr val="accent1"/>
+          </a:effectRef>
+          <a:fontRef idx="minor">
+            <a:schemeClr val="lt1"/>
+          </a:fontRef>
+        </p:style>
+        <p:txBody>
+          <a:bodyPr rtlCol="0" anchor="ctr"/>
+          <a:lstStyle/>
+          <a:p>
+            <a:endParaRPr kumimoji="1" lang="en-US" altLang="ja-JP" sz="2800" dirty="0">
+              <a:solidFill>
+                <a:schemeClr val="bg2"/>
+              </a:solidFill>
+              <a:latin typeface="HGP創英角ﾎﾟｯﾌﾟ体" panose="040B0A00000000000000" pitchFamily="50" charset="-128"/>
+              <a:ea typeface="HGP創英角ﾎﾟｯﾌﾟ体" panose="040B0A00000000000000" pitchFamily="50" charset="-128"/>
+            </a:endParaRPr>
+          </a:p>
+          <a:p>
+            <a:r>
+              <a:rPr kumimoji="1" lang="ja-JP" altLang="en-US" sz="2800" dirty="0">
+                <a:solidFill>
+                  <a:schemeClr val="bg2"/>
+                </a:solidFill>
+                <a:latin typeface="HGP創英角ﾎﾟｯﾌﾟ体" panose="040B0A00000000000000" pitchFamily="50" charset="-128"/>
+                <a:ea typeface="HGP創英角ﾎﾟｯﾌﾟ体" panose="040B0A00000000000000" pitchFamily="50" charset="-128"/>
+              </a:rPr>
+              <a:t>★転職の際に応募をし、面接日やその他連絡等が早く来たほうが</a:t>
+            </a:r>
+            <a:endParaRPr kumimoji="1" lang="en-US" altLang="ja-JP" sz="2800" dirty="0">
+              <a:solidFill>
+                <a:schemeClr val="bg2"/>
+              </a:solidFill>
+              <a:latin typeface="HGP創英角ﾎﾟｯﾌﾟ体" panose="040B0A00000000000000" pitchFamily="50" charset="-128"/>
+              <a:ea typeface="HGP創英角ﾎﾟｯﾌﾟ体" panose="040B0A00000000000000" pitchFamily="50" charset="-128"/>
+            </a:endParaRPr>
+          </a:p>
+          <a:p>
+            <a:r>
+              <a:rPr kumimoji="1" lang="ja-JP" altLang="en-US" sz="2800" dirty="0">
+                <a:solidFill>
+                  <a:schemeClr val="bg2"/>
+                </a:solidFill>
+                <a:latin typeface="HGP創英角ﾎﾟｯﾌﾟ体" panose="040B0A00000000000000" pitchFamily="50" charset="-128"/>
+                <a:ea typeface="HGP創英角ﾎﾟｯﾌﾟ体" panose="040B0A00000000000000" pitchFamily="50" charset="-128"/>
+              </a:rPr>
+              <a:t>　印象が良かったため。早いと</a:t>
+            </a:r>
+            <a:r>
+              <a:rPr kumimoji="1" lang="ja-JP" altLang="en-US" sz="2800" u="sng" dirty="0">
+                <a:solidFill>
+                  <a:srgbClr val="FF0000"/>
+                </a:solidFill>
+                <a:latin typeface="HGP創英角ﾎﾟｯﾌﾟ体" panose="040B0A00000000000000" pitchFamily="50" charset="-128"/>
+                <a:ea typeface="HGP創英角ﾎﾟｯﾌﾟ体" panose="040B0A00000000000000" pitchFamily="50" charset="-128"/>
+              </a:rPr>
+              <a:t>「採用に対する気持ち」</a:t>
+            </a:r>
+            <a:r>
+              <a:rPr kumimoji="1" lang="ja-JP" altLang="en-US" sz="2800" dirty="0">
+                <a:solidFill>
+                  <a:schemeClr val="bg2"/>
+                </a:solidFill>
+                <a:latin typeface="HGP創英角ﾎﾟｯﾌﾟ体" panose="040B0A00000000000000" pitchFamily="50" charset="-128"/>
+                <a:ea typeface="HGP創英角ﾎﾟｯﾌﾟ体" panose="040B0A00000000000000" pitchFamily="50" charset="-128"/>
+              </a:rPr>
+              <a:t>が高いのかと</a:t>
+            </a:r>
+            <a:endParaRPr kumimoji="1" lang="en-US" altLang="ja-JP" sz="2800" dirty="0">
+              <a:solidFill>
+                <a:schemeClr val="bg2"/>
+              </a:solidFill>
+              <a:latin typeface="HGP創英角ﾎﾟｯﾌﾟ体" panose="040B0A00000000000000" pitchFamily="50" charset="-128"/>
+              <a:ea typeface="HGP創英角ﾎﾟｯﾌﾟ体" panose="040B0A00000000000000" pitchFamily="50" charset="-128"/>
+            </a:endParaRPr>
+          </a:p>
+          <a:p>
+            <a:r>
+              <a:rPr kumimoji="1" lang="ja-JP" altLang="en-US" sz="2800" dirty="0">
+                <a:solidFill>
+                  <a:schemeClr val="bg2"/>
+                </a:solidFill>
+                <a:latin typeface="HGP創英角ﾎﾟｯﾌﾟ体" panose="040B0A00000000000000" pitchFamily="50" charset="-128"/>
+                <a:ea typeface="HGP創英角ﾎﾟｯﾌﾟ体" panose="040B0A00000000000000" pitchFamily="50" charset="-128"/>
+              </a:rPr>
+              <a:t>　感じたため。</a:t>
+            </a:r>
+            <a:endParaRPr kumimoji="1" lang="en-US" altLang="ja-JP" sz="2800" dirty="0">
+              <a:solidFill>
+                <a:schemeClr val="bg2"/>
+              </a:solidFill>
+              <a:latin typeface="HGP創英角ﾎﾟｯﾌﾟ体" panose="040B0A00000000000000" pitchFamily="50" charset="-128"/>
+              <a:ea typeface="HGP創英角ﾎﾟｯﾌﾟ体" panose="040B0A00000000000000" pitchFamily="50" charset="-128"/>
+            </a:endParaRPr>
+          </a:p>
+          <a:p>
+            <a:endParaRPr kumimoji="1" lang="en-US" altLang="ja-JP" sz="2800" dirty="0">
+              <a:solidFill>
+                <a:schemeClr val="bg2"/>
+              </a:solidFill>
+              <a:latin typeface="HGP創英角ﾎﾟｯﾌﾟ体" panose="040B0A00000000000000" pitchFamily="50" charset="-128"/>
+              <a:ea typeface="HGP創英角ﾎﾟｯﾌﾟ体" panose="040B0A00000000000000" pitchFamily="50" charset="-128"/>
+            </a:endParaRPr>
+          </a:p>
+          <a:p>
+            <a:r>
+              <a:rPr kumimoji="1" lang="ja-JP" altLang="en-US" sz="2800" dirty="0">
+                <a:solidFill>
+                  <a:schemeClr val="bg2"/>
+                </a:solidFill>
+                <a:latin typeface="HGP創英角ﾎﾟｯﾌﾟ体" panose="040B0A00000000000000" pitchFamily="50" charset="-128"/>
+                <a:ea typeface="HGP創英角ﾎﾟｯﾌﾟ体" panose="040B0A00000000000000" pitchFamily="50" charset="-128"/>
+              </a:rPr>
+              <a:t>★前職にて、問い合わせのあった際にどれだけ</a:t>
+            </a:r>
+            <a:r>
+              <a:rPr kumimoji="1" lang="ja-JP" altLang="en-US" sz="2800" dirty="0">
+                <a:solidFill>
+                  <a:srgbClr val="FF0000"/>
+                </a:solidFill>
+                <a:latin typeface="HGP創英角ﾎﾟｯﾌﾟ体" panose="040B0A00000000000000" pitchFamily="50" charset="-128"/>
+                <a:ea typeface="HGP創英角ﾎﾟｯﾌﾟ体" panose="040B0A00000000000000" pitchFamily="50" charset="-128"/>
+              </a:rPr>
+              <a:t>第一アクションを</a:t>
+            </a:r>
+            <a:endParaRPr kumimoji="1" lang="en-US" altLang="ja-JP" sz="2800" dirty="0">
+              <a:solidFill>
+                <a:srgbClr val="FF0000"/>
+              </a:solidFill>
+              <a:latin typeface="HGP創英角ﾎﾟｯﾌﾟ体" panose="040B0A00000000000000" pitchFamily="50" charset="-128"/>
+              <a:ea typeface="HGP創英角ﾎﾟｯﾌﾟ体" panose="040B0A00000000000000" pitchFamily="50" charset="-128"/>
+            </a:endParaRPr>
+          </a:p>
+          <a:p>
+            <a:r>
+              <a:rPr kumimoji="1" lang="ja-JP" altLang="en-US" sz="2800" dirty="0">
+                <a:solidFill>
+                  <a:srgbClr val="FF0000"/>
+                </a:solidFill>
+                <a:latin typeface="HGP創英角ﾎﾟｯﾌﾟ体" panose="040B0A00000000000000" pitchFamily="50" charset="-128"/>
+                <a:ea typeface="HGP創英角ﾎﾟｯﾌﾟ体" panose="040B0A00000000000000" pitchFamily="50" charset="-128"/>
+              </a:rPr>
+              <a:t>　早く</a:t>
+            </a:r>
+            <a:r>
+              <a:rPr kumimoji="1" lang="ja-JP" altLang="en-US" sz="2800" dirty="0">
+                <a:solidFill>
+                  <a:schemeClr val="bg2"/>
+                </a:solidFill>
+                <a:latin typeface="HGP創英角ﾎﾟｯﾌﾟ体" panose="040B0A00000000000000" pitchFamily="50" charset="-128"/>
+                <a:ea typeface="HGP創英角ﾎﾟｯﾌﾟ体" panose="040B0A00000000000000" pitchFamily="50" charset="-128"/>
+              </a:rPr>
+              <a:t>とれるかということをポイントにしてやっていた。</a:t>
+            </a:r>
+            <a:endParaRPr kumimoji="1" lang="en-US" altLang="ja-JP" sz="2800" dirty="0">
+              <a:solidFill>
+                <a:schemeClr val="bg2"/>
+              </a:solidFill>
+              <a:latin typeface="HGP創英角ﾎﾟｯﾌﾟ体" panose="040B0A00000000000000" pitchFamily="50" charset="-128"/>
+              <a:ea typeface="HGP創英角ﾎﾟｯﾌﾟ体" panose="040B0A00000000000000" pitchFamily="50" charset="-128"/>
+            </a:endParaRPr>
+          </a:p>
+          <a:p>
+            <a:r>
+              <a:rPr kumimoji="1" lang="ja-JP" altLang="en-US" sz="2800" dirty="0">
+                <a:solidFill>
+                  <a:schemeClr val="bg2"/>
+                </a:solidFill>
+                <a:latin typeface="HGP創英角ﾎﾟｯﾌﾟ体" panose="040B0A00000000000000" pitchFamily="50" charset="-128"/>
+                <a:ea typeface="HGP創英角ﾎﾟｯﾌﾟ体" panose="040B0A00000000000000" pitchFamily="50" charset="-128"/>
+              </a:rPr>
+              <a:t>　やはり応募や問い合わせをする時点で検討段階にあるので、</a:t>
+            </a:r>
+            <a:endParaRPr kumimoji="1" lang="en-US" altLang="ja-JP" sz="2800" dirty="0">
+              <a:solidFill>
+                <a:schemeClr val="bg2"/>
+              </a:solidFill>
+              <a:latin typeface="HGP創英角ﾎﾟｯﾌﾟ体" panose="040B0A00000000000000" pitchFamily="50" charset="-128"/>
+              <a:ea typeface="HGP創英角ﾎﾟｯﾌﾟ体" panose="040B0A00000000000000" pitchFamily="50" charset="-128"/>
+            </a:endParaRPr>
+          </a:p>
+          <a:p>
+            <a:r>
+              <a:rPr kumimoji="1" lang="ja-JP" altLang="en-US" sz="2800" dirty="0">
+                <a:solidFill>
+                  <a:schemeClr val="bg2"/>
+                </a:solidFill>
+                <a:latin typeface="HGP創英角ﾎﾟｯﾌﾟ体" panose="040B0A00000000000000" pitchFamily="50" charset="-128"/>
+                <a:ea typeface="HGP創英角ﾎﾟｯﾌﾟ体" panose="040B0A00000000000000" pitchFamily="50" charset="-128"/>
+              </a:rPr>
+              <a:t>　</a:t>
+            </a:r>
+            <a:r>
+              <a:rPr kumimoji="1" lang="ja-JP" altLang="en-US" sz="2800" dirty="0">
+                <a:solidFill>
+                  <a:srgbClr val="FF0000"/>
+                </a:solidFill>
+                <a:latin typeface="HGP創英角ﾎﾟｯﾌﾟ体" panose="040B0A00000000000000" pitchFamily="50" charset="-128"/>
+                <a:ea typeface="HGP創英角ﾎﾟｯﾌﾟ体" panose="040B0A00000000000000" pitchFamily="50" charset="-128"/>
+              </a:rPr>
+              <a:t>他よりも早く検討してもらう</a:t>
+            </a:r>
+            <a:r>
+              <a:rPr kumimoji="1" lang="ja-JP" altLang="en-US" sz="2800" dirty="0">
+                <a:solidFill>
+                  <a:schemeClr val="bg2"/>
+                </a:solidFill>
+                <a:latin typeface="HGP創英角ﾎﾟｯﾌﾟ体" panose="040B0A00000000000000" pitchFamily="50" charset="-128"/>
+                <a:ea typeface="HGP創英角ﾎﾟｯﾌﾟ体" panose="040B0A00000000000000" pitchFamily="50" charset="-128"/>
+              </a:rPr>
+              <a:t>ことで、次の選択肢を相手に増やさずに</a:t>
+            </a:r>
+            <a:endParaRPr kumimoji="1" lang="en-US" altLang="ja-JP" sz="2800" dirty="0">
+              <a:solidFill>
+                <a:schemeClr val="bg2"/>
+              </a:solidFill>
+              <a:latin typeface="HGP創英角ﾎﾟｯﾌﾟ体" panose="040B0A00000000000000" pitchFamily="50" charset="-128"/>
+              <a:ea typeface="HGP創英角ﾎﾟｯﾌﾟ体" panose="040B0A00000000000000" pitchFamily="50" charset="-128"/>
+            </a:endParaRPr>
+          </a:p>
+          <a:p>
+            <a:r>
+              <a:rPr kumimoji="1" lang="ja-JP" altLang="en-US" sz="2800" dirty="0">
+                <a:solidFill>
+                  <a:schemeClr val="bg2"/>
+                </a:solidFill>
+                <a:latin typeface="HGP創英角ﾎﾟｯﾌﾟ体" panose="040B0A00000000000000" pitchFamily="50" charset="-128"/>
+                <a:ea typeface="HGP創英角ﾎﾟｯﾌﾟ体" panose="040B0A00000000000000" pitchFamily="50" charset="-128"/>
+              </a:rPr>
+              <a:t>　いい人材を獲得していけると感じたから。</a:t>
+            </a:r>
+            <a:endParaRPr kumimoji="1" lang="en-US" altLang="ja-JP" sz="2800" dirty="0">
+              <a:solidFill>
+                <a:schemeClr val="bg2"/>
+              </a:solidFill>
+              <a:latin typeface="HGP創英角ﾎﾟｯﾌﾟ体" panose="040B0A00000000000000" pitchFamily="50" charset="-128"/>
+              <a:ea typeface="HGP創英角ﾎﾟｯﾌﾟ体" panose="040B0A00000000000000" pitchFamily="50" charset="-128"/>
+            </a:endParaRPr>
+          </a:p>
+          <a:p>
+            <a:r>
+              <a:rPr kumimoji="1" lang="ja-JP" altLang="en-US" sz="2800" dirty="0">
+                <a:solidFill>
+                  <a:schemeClr val="bg2"/>
+                </a:solidFill>
+                <a:latin typeface="HGP創英角ﾎﾟｯﾌﾟ体" panose="040B0A00000000000000" pitchFamily="50" charset="-128"/>
+                <a:ea typeface="HGP創英角ﾎﾟｯﾌﾟ体" panose="040B0A00000000000000" pitchFamily="50" charset="-128"/>
+              </a:rPr>
+              <a:t>　そしてその方が</a:t>
+            </a:r>
+            <a:r>
+              <a:rPr kumimoji="1" lang="ja-JP" altLang="en-US" sz="2800" dirty="0">
+                <a:solidFill>
+                  <a:srgbClr val="FF0000"/>
+                </a:solidFill>
+                <a:latin typeface="HGP創英角ﾎﾟｯﾌﾟ体" panose="040B0A00000000000000" pitchFamily="50" charset="-128"/>
+                <a:ea typeface="HGP創英角ﾎﾟｯﾌﾟ体" panose="040B0A00000000000000" pitchFamily="50" charset="-128"/>
+              </a:rPr>
+              <a:t>面接の決定率・採用率の向上に繋がる</a:t>
+            </a:r>
+            <a:r>
+              <a:rPr kumimoji="1" lang="ja-JP" altLang="en-US" sz="2800" dirty="0">
+                <a:solidFill>
+                  <a:schemeClr val="bg2"/>
+                </a:solidFill>
+                <a:latin typeface="HGP創英角ﾎﾟｯﾌﾟ体" panose="040B0A00000000000000" pitchFamily="50" charset="-128"/>
+                <a:ea typeface="HGP創英角ﾎﾟｯﾌﾟ体" panose="040B0A00000000000000" pitchFamily="50" charset="-128"/>
+              </a:rPr>
+              <a:t>と考えたため。</a:t>
+            </a:r>
+            <a:endParaRPr kumimoji="1" lang="en-US" altLang="ja-JP" sz="2800" dirty="0">
+              <a:solidFill>
+                <a:schemeClr val="bg2"/>
+              </a:solidFill>
+              <a:latin typeface="HGP創英角ﾎﾟｯﾌﾟ体" panose="040B0A00000000000000" pitchFamily="50" charset="-128"/>
+              <a:ea typeface="HGP創英角ﾎﾟｯﾌﾟ体" panose="040B0A00000000000000" pitchFamily="50" charset="-128"/>
+            </a:endParaRPr>
+          </a:p>
+          <a:p>
+            <a:r>
+              <a:rPr kumimoji="1" lang="ja-JP" altLang="en-US" sz="2800" dirty="0">
+                <a:solidFill>
+                  <a:schemeClr val="bg2"/>
+                </a:solidFill>
+                <a:latin typeface="HGP創英角ﾎﾟｯﾌﾟ体" panose="040B0A00000000000000" pitchFamily="50" charset="-128"/>
+                <a:ea typeface="HGP創英角ﾎﾟｯﾌﾟ体" panose="040B0A00000000000000" pitchFamily="50" charset="-128"/>
+              </a:rPr>
+              <a:t>　</a:t>
+            </a:r>
+            <a:endParaRPr kumimoji="1" lang="en-US" altLang="ja-JP" sz="2800" dirty="0">
+              <a:solidFill>
+                <a:schemeClr val="bg2"/>
+              </a:solidFill>
+              <a:latin typeface="HGP創英角ﾎﾟｯﾌﾟ体" panose="040B0A00000000000000" pitchFamily="50" charset="-128"/>
+              <a:ea typeface="HGP創英角ﾎﾟｯﾌﾟ体" panose="040B0A00000000000000" pitchFamily="50" charset="-128"/>
+            </a:endParaRPr>
+          </a:p>
+        </p:txBody>
+      </p:sp>
+    </p:spTree>
+    <p:extLst>
+      <p:ext uri="{BB962C8B-B14F-4D97-AF65-F5344CB8AC3E}">
+        <p14:creationId xmlns:p14="http://schemas.microsoft.com/office/powerpoint/2010/main" val="752222305"/>
+      </p:ext>
+    </p:extLst>
+  </p:cSld>
+  <p:clrMapOvr>
+    <a:masterClrMapping/>
+  </p:clrMapOvr>
+</p:sld>
+</file>
+
+<file path=ppt/slides/slide3.xml><?xml version="1.0" encoding="utf-8"?>
+<p:sld xmlns:a="http://schemas.openxmlformats.org/drawingml/2006/main" xmlns:r="http://schemas.openxmlformats.org/officeDocument/2006/relationships" xmlns:p="http://schemas.openxmlformats.org/presentationml/2006/main">
+  <p:cSld>
     <p:spTree>
       <p:nvGrpSpPr>
         <p:cNvPr id="1" name=""/>
@@ -11306,7 +11761,7 @@
 </p:sld>
 </file>
 
-<file path=ppt/slides/slide3.xml><?xml version="1.0" encoding="utf-8"?>
+<file path=ppt/slides/slide4.xml><?xml version="1.0" encoding="utf-8"?>
 <p:sld xmlns:a="http://schemas.openxmlformats.org/drawingml/2006/main" xmlns:r="http://schemas.openxmlformats.org/officeDocument/2006/relationships" xmlns:p="http://schemas.openxmlformats.org/presentationml/2006/main">
   <p:cSld>
     <p:spTree>
@@ -12169,7 +12624,7 @@
 </p:sld>
 </file>
 
-<file path=ppt/slides/slide4.xml><?xml version="1.0" encoding="utf-8"?>
+<file path=ppt/slides/slide5.xml><?xml version="1.0" encoding="utf-8"?>
 <p:sld xmlns:a="http://schemas.openxmlformats.org/drawingml/2006/main" xmlns:r="http://schemas.openxmlformats.org/officeDocument/2006/relationships" xmlns:p="http://schemas.openxmlformats.org/presentationml/2006/main">
   <p:cSld>
     <p:spTree>
@@ -12465,7 +12920,7 @@
 </p:sld>
 </file>
 
-<file path=ppt/slides/slide5.xml><?xml version="1.0" encoding="utf-8"?>
+<file path=ppt/slides/slide6.xml><?xml version="1.0" encoding="utf-8"?>
 <p:sld xmlns:a="http://schemas.openxmlformats.org/drawingml/2006/main" xmlns:r="http://schemas.openxmlformats.org/officeDocument/2006/relationships" xmlns:p="http://schemas.openxmlformats.org/presentationml/2006/main">
   <p:cSld>
     <p:bg>

--- a/採用管理システム.pptx
+++ b/採用管理システム.pptx
@@ -10,7 +10,8 @@
     <p:sldId id="257" r:id="rId4"/>
     <p:sldId id="258" r:id="rId5"/>
     <p:sldId id="259" r:id="rId6"/>
-    <p:sldId id="260" r:id="rId7"/>
+    <p:sldId id="263" r:id="rId7"/>
+    <p:sldId id="260" r:id="rId8"/>
   </p:sldIdLst>
   <p:sldSz cx="12192000" cy="6858000"/>
   <p:notesSz cx="6858000" cy="9144000"/>
@@ -345,7 +346,7 @@
           <a:p>
             <a:fld id="{8DC4806F-8A57-40BE-A78D-79608F060769}" type="datetimeFigureOut">
               <a:rPr kumimoji="1" lang="ja-JP" altLang="en-US" smtClean="0"/>
-              <a:t>2026/10/15</a:t>
+              <a:t>2026/10/20</a:t>
             </a:fld>
             <a:endParaRPr kumimoji="1" lang="ja-JP" altLang="en-US"/>
           </a:p>
@@ -692,7 +693,7 @@
           <a:p>
             <a:fld id="{8DC4806F-8A57-40BE-A78D-79608F060769}" type="datetimeFigureOut">
               <a:rPr kumimoji="1" lang="ja-JP" altLang="en-US" smtClean="0"/>
-              <a:t>2026/10/15</a:t>
+              <a:t>2026/10/20</a:t>
             </a:fld>
             <a:endParaRPr kumimoji="1" lang="ja-JP" altLang="en-US"/>
           </a:p>
@@ -1038,7 +1039,7 @@
           <a:p>
             <a:fld id="{8DC4806F-8A57-40BE-A78D-79608F060769}" type="datetimeFigureOut">
               <a:rPr kumimoji="1" lang="ja-JP" altLang="en-US" smtClean="0"/>
-              <a:t>2026/10/15</a:t>
+              <a:t>2026/10/20</a:t>
             </a:fld>
             <a:endParaRPr kumimoji="1" lang="ja-JP" altLang="en-US"/>
           </a:p>
@@ -1333,7 +1334,7 @@
           <a:p>
             <a:fld id="{8DC4806F-8A57-40BE-A78D-79608F060769}" type="datetimeFigureOut">
               <a:rPr kumimoji="1" lang="ja-JP" altLang="en-US" smtClean="0"/>
-              <a:t>2026/10/15</a:t>
+              <a:t>2026/10/20</a:t>
             </a:fld>
             <a:endParaRPr kumimoji="1" lang="ja-JP" altLang="en-US"/>
           </a:p>
@@ -1684,7 +1685,7 @@
           <a:p>
             <a:fld id="{8DC4806F-8A57-40BE-A78D-79608F060769}" type="datetimeFigureOut">
               <a:rPr kumimoji="1" lang="ja-JP" altLang="en-US" smtClean="0"/>
-              <a:t>2026/10/15</a:t>
+              <a:t>2026/10/20</a:t>
             </a:fld>
             <a:endParaRPr kumimoji="1" lang="ja-JP" altLang="en-US"/>
           </a:p>
@@ -2037,7 +2038,7 @@
           <a:p>
             <a:fld id="{8DC4806F-8A57-40BE-A78D-79608F060769}" type="datetimeFigureOut">
               <a:rPr kumimoji="1" lang="ja-JP" altLang="en-US" smtClean="0"/>
-              <a:t>2026/10/15</a:t>
+              <a:t>2026/10/20</a:t>
             </a:fld>
             <a:endParaRPr kumimoji="1" lang="ja-JP" altLang="en-US"/>
           </a:p>
@@ -2378,7 +2379,7 @@
           <a:p>
             <a:fld id="{8DC4806F-8A57-40BE-A78D-79608F060769}" type="datetimeFigureOut">
               <a:rPr kumimoji="1" lang="ja-JP" altLang="en-US" smtClean="0"/>
-              <a:t>2026/10/15</a:t>
+              <a:t>2026/10/20</a:t>
             </a:fld>
             <a:endParaRPr kumimoji="1" lang="ja-JP" altLang="en-US"/>
           </a:p>
@@ -2949,7 +2950,7 @@
           <a:p>
             <a:fld id="{8DC4806F-8A57-40BE-A78D-79608F060769}" type="datetimeFigureOut">
               <a:rPr kumimoji="1" lang="ja-JP" altLang="en-US" smtClean="0"/>
-              <a:t>2026/10/15</a:t>
+              <a:t>2026/10/20</a:t>
             </a:fld>
             <a:endParaRPr kumimoji="1" lang="ja-JP" altLang="en-US"/>
           </a:p>
@@ -3194,7 +3195,7 @@
           <a:p>
             <a:fld id="{8DC4806F-8A57-40BE-A78D-79608F060769}" type="datetimeFigureOut">
               <a:rPr kumimoji="1" lang="ja-JP" altLang="en-US" smtClean="0"/>
-              <a:t>2026/10/15</a:t>
+              <a:t>2026/10/20</a:t>
             </a:fld>
             <a:endParaRPr kumimoji="1" lang="ja-JP" altLang="en-US"/>
           </a:p>
@@ -3585,7 +3586,7 @@
           <a:p>
             <a:fld id="{8DC4806F-8A57-40BE-A78D-79608F060769}" type="datetimeFigureOut">
               <a:rPr kumimoji="1" lang="ja-JP" altLang="en-US" smtClean="0"/>
-              <a:t>2026/10/15</a:t>
+              <a:t>2026/10/20</a:t>
             </a:fld>
             <a:endParaRPr kumimoji="1" lang="ja-JP" altLang="en-US"/>
           </a:p>
@@ -4109,7 +4110,7 @@
           <a:p>
             <a:fld id="{8DC4806F-8A57-40BE-A78D-79608F060769}" type="datetimeFigureOut">
               <a:rPr kumimoji="1" lang="ja-JP" altLang="en-US" smtClean="0"/>
-              <a:t>2026/10/15</a:t>
+              <a:t>2026/10/20</a:t>
             </a:fld>
             <a:endParaRPr kumimoji="1" lang="ja-JP" altLang="en-US"/>
           </a:p>
@@ -4417,7 +4418,7 @@
           <a:p>
             <a:fld id="{8DC4806F-8A57-40BE-A78D-79608F060769}" type="datetimeFigureOut">
               <a:rPr kumimoji="1" lang="ja-JP" altLang="en-US" smtClean="0"/>
-              <a:t>2026/10/15</a:t>
+              <a:t>2026/10/20</a:t>
             </a:fld>
             <a:endParaRPr kumimoji="1" lang="ja-JP" altLang="en-US"/>
           </a:p>
@@ -4752,7 +4753,7 @@
           <a:p>
             <a:fld id="{8DC4806F-8A57-40BE-A78D-79608F060769}" type="datetimeFigureOut">
               <a:rPr kumimoji="1" lang="ja-JP" altLang="en-US" smtClean="0"/>
-              <a:t>2026/10/15</a:t>
+              <a:t>2026/10/20</a:t>
             </a:fld>
             <a:endParaRPr kumimoji="1" lang="ja-JP" altLang="en-US"/>
           </a:p>
@@ -5097,7 +5098,7 @@
           <a:p>
             <a:fld id="{8DC4806F-8A57-40BE-A78D-79608F060769}" type="datetimeFigureOut">
               <a:rPr kumimoji="1" lang="ja-JP" altLang="en-US" smtClean="0"/>
-              <a:t>2026/10/15</a:t>
+              <a:t>2026/10/20</a:t>
             </a:fld>
             <a:endParaRPr kumimoji="1" lang="ja-JP" altLang="en-US"/>
           </a:p>
@@ -5350,7 +5351,7 @@
           <a:p>
             <a:fld id="{8DC4806F-8A57-40BE-A78D-79608F060769}" type="datetimeFigureOut">
               <a:rPr kumimoji="1" lang="ja-JP" altLang="en-US" smtClean="0"/>
-              <a:t>2026/10/15</a:t>
+              <a:t>2026/10/20</a:t>
             </a:fld>
             <a:endParaRPr kumimoji="1" lang="ja-JP" altLang="en-US"/>
           </a:p>
@@ -5737,7 +5738,7 @@
           <a:p>
             <a:fld id="{8DC4806F-8A57-40BE-A78D-79608F060769}" type="datetimeFigureOut">
               <a:rPr kumimoji="1" lang="ja-JP" altLang="en-US" smtClean="0"/>
-              <a:t>2026/10/15</a:t>
+              <a:t>2026/10/20</a:t>
             </a:fld>
             <a:endParaRPr kumimoji="1" lang="ja-JP" altLang="en-US"/>
           </a:p>
@@ -6265,7 +6266,7 @@
           <a:p>
             <a:fld id="{8DC4806F-8A57-40BE-A78D-79608F060769}" type="datetimeFigureOut">
               <a:rPr kumimoji="1" lang="ja-JP" altLang="en-US" smtClean="0"/>
-              <a:t>2026/10/15</a:t>
+              <a:t>2026/10/20</a:t>
             </a:fld>
             <a:endParaRPr kumimoji="1" lang="ja-JP" altLang="en-US"/>
           </a:p>
@@ -6378,7 +6379,7 @@
           <a:p>
             <a:fld id="{8DC4806F-8A57-40BE-A78D-79608F060769}" type="datetimeFigureOut">
               <a:rPr kumimoji="1" lang="ja-JP" altLang="en-US" smtClean="0"/>
-              <a:t>2026/10/15</a:t>
+              <a:t>2026/10/20</a:t>
             </a:fld>
             <a:endParaRPr kumimoji="1" lang="ja-JP" altLang="en-US"/>
           </a:p>
@@ -6611,7 +6612,7 @@
           <a:p>
             <a:fld id="{8DC4806F-8A57-40BE-A78D-79608F060769}" type="datetimeFigureOut">
               <a:rPr kumimoji="1" lang="ja-JP" altLang="en-US" smtClean="0"/>
-              <a:t>2026/10/15</a:t>
+              <a:t>2026/10/20</a:t>
             </a:fld>
             <a:endParaRPr kumimoji="1" lang="ja-JP" altLang="en-US"/>
           </a:p>
@@ -7045,7 +7046,7 @@
           <a:p>
             <a:fld id="{8DC4806F-8A57-40BE-A78D-79608F060769}" type="datetimeFigureOut">
               <a:rPr kumimoji="1" lang="ja-JP" altLang="en-US" smtClean="0"/>
-              <a:t>2026/10/15</a:t>
+              <a:t>2026/10/20</a:t>
             </a:fld>
             <a:endParaRPr kumimoji="1" lang="ja-JP" altLang="en-US"/>
           </a:p>
@@ -7365,7 +7366,7 @@
           <a:p>
             <a:fld id="{8DC4806F-8A57-40BE-A78D-79608F060769}" type="datetimeFigureOut">
               <a:rPr kumimoji="1" lang="ja-JP" altLang="en-US" smtClean="0"/>
-              <a:t>2026/10/15</a:t>
+              <a:t>2026/10/20</a:t>
             </a:fld>
             <a:endParaRPr kumimoji="1" lang="ja-JP" altLang="en-US"/>
           </a:p>
@@ -7666,7 +7667,7 @@
           <a:p>
             <a:fld id="{8DC4806F-8A57-40BE-A78D-79608F060769}" type="datetimeFigureOut">
               <a:rPr kumimoji="1" lang="ja-JP" altLang="en-US" smtClean="0"/>
-              <a:t>2026/10/15</a:t>
+              <a:t>2026/10/20</a:t>
             </a:fld>
             <a:endParaRPr kumimoji="1" lang="ja-JP" altLang="en-US"/>
           </a:p>
@@ -7954,7 +7955,7 @@
           <a:p>
             <a:fld id="{8DC4806F-8A57-40BE-A78D-79608F060769}" type="datetimeFigureOut">
               <a:rPr kumimoji="1" lang="ja-JP" altLang="en-US" smtClean="0"/>
-              <a:t>2026/10/15</a:t>
+              <a:t>2026/10/20</a:t>
             </a:fld>
             <a:endParaRPr kumimoji="1" lang="ja-JP" altLang="en-US"/>
           </a:p>
@@ -8301,7 +8302,7 @@
           <a:p>
             <a:fld id="{8DC4806F-8A57-40BE-A78D-79608F060769}" type="datetimeFigureOut">
               <a:rPr kumimoji="1" lang="ja-JP" altLang="en-US" smtClean="0"/>
-              <a:t>2026/10/15</a:t>
+              <a:t>2026/10/20</a:t>
             </a:fld>
             <a:endParaRPr kumimoji="1" lang="ja-JP" altLang="en-US"/>
           </a:p>
@@ -8734,7 +8735,7 @@
           <a:p>
             <a:fld id="{8DC4806F-8A57-40BE-A78D-79608F060769}" type="datetimeFigureOut">
               <a:rPr kumimoji="1" lang="ja-JP" altLang="en-US" smtClean="0"/>
-              <a:t>2026/10/15</a:t>
+              <a:t>2026/10/20</a:t>
             </a:fld>
             <a:endParaRPr kumimoji="1" lang="ja-JP" altLang="en-US"/>
           </a:p>
@@ -9074,7 +9075,7 @@
           <a:p>
             <a:fld id="{8DC4806F-8A57-40BE-A78D-79608F060769}" type="datetimeFigureOut">
               <a:rPr kumimoji="1" lang="ja-JP" altLang="en-US" smtClean="0"/>
-              <a:t>2026/10/15</a:t>
+              <a:t>2026/10/20</a:t>
             </a:fld>
             <a:endParaRPr kumimoji="1" lang="ja-JP" altLang="en-US"/>
           </a:p>
@@ -9457,7 +9458,7 @@
           <a:p>
             <a:fld id="{8DC4806F-8A57-40BE-A78D-79608F060769}" type="datetimeFigureOut">
               <a:rPr kumimoji="1" lang="ja-JP" altLang="en-US" smtClean="0"/>
-              <a:t>2026/10/15</a:t>
+              <a:t>2026/10/20</a:t>
             </a:fld>
             <a:endParaRPr kumimoji="1" lang="ja-JP" altLang="en-US"/>
           </a:p>
@@ -9836,7 +9837,7 @@
           <a:p>
             <a:fld id="{8DC4806F-8A57-40BE-A78D-79608F060769}" type="datetimeFigureOut">
               <a:rPr kumimoji="1" lang="ja-JP" altLang="en-US" smtClean="0"/>
-              <a:t>2026/10/15</a:t>
+              <a:t>2026/10/20</a:t>
             </a:fld>
             <a:endParaRPr kumimoji="1" lang="ja-JP" altLang="en-US"/>
           </a:p>
@@ -12926,6 +12927,481 @@
     <p:bg>
       <p:bgPr>
         <a:solidFill>
+          <a:schemeClr val="bg1">
+            <a:alpha val="0"/>
+          </a:schemeClr>
+        </a:solidFill>
+        <a:effectLst/>
+      </p:bgPr>
+    </p:bg>
+    <p:spTree>
+      <p:nvGrpSpPr>
+        <p:cNvPr id="1" name="">
+          <a:extLst>
+            <a:ext uri="{FF2B5EF4-FFF2-40B4-BE49-F238E27FC236}">
+              <a16:creationId xmlns:a16="http://schemas.microsoft.com/office/drawing/2014/main" id="{EC6B0735-6595-FEF9-D7AA-4269816DA60D}"/>
+            </a:ext>
+          </a:extLst>
+        </p:cNvPr>
+        <p:cNvGrpSpPr/>
+        <p:nvPr/>
+      </p:nvGrpSpPr>
+      <p:grpSpPr>
+        <a:xfrm>
+          <a:off x="0" y="0"/>
+          <a:ext cx="0" cy="0"/>
+          <a:chOff x="0" y="0"/>
+          <a:chExt cx="0" cy="0"/>
+        </a:xfrm>
+      </p:grpSpPr>
+      <p:sp>
+        <p:nvSpPr>
+          <p:cNvPr id="4" name="正方形/長方形 3">
+            <a:extLst>
+              <a:ext uri="{FF2B5EF4-FFF2-40B4-BE49-F238E27FC236}">
+                <a16:creationId xmlns:a16="http://schemas.microsoft.com/office/drawing/2014/main" id="{412FBD21-3317-656E-B975-605B2D013B11}"/>
+              </a:ext>
+            </a:extLst>
+          </p:cNvPr>
+          <p:cNvSpPr/>
+          <p:nvPr/>
+        </p:nvSpPr>
+        <p:spPr>
+          <a:xfrm>
+            <a:off x="0" y="328773"/>
+            <a:ext cx="5414481" cy="616450"/>
+          </a:xfrm>
+          <a:prstGeom prst="rect">
+            <a:avLst/>
+          </a:prstGeom>
+          <a:noFill/>
+          <a:ln>
+            <a:noFill/>
+          </a:ln>
+        </p:spPr>
+        <p:style>
+          <a:lnRef idx="2">
+            <a:schemeClr val="accent1">
+              <a:shade val="15000"/>
+            </a:schemeClr>
+          </a:lnRef>
+          <a:fillRef idx="1">
+            <a:schemeClr val="accent1"/>
+          </a:fillRef>
+          <a:effectRef idx="0">
+            <a:schemeClr val="accent1"/>
+          </a:effectRef>
+          <a:fontRef idx="minor">
+            <a:schemeClr val="lt1"/>
+          </a:fontRef>
+        </p:style>
+        <p:txBody>
+          <a:bodyPr rtlCol="0" anchor="ctr"/>
+          <a:lstStyle/>
+          <a:p>
+            <a:pPr algn="ctr"/>
+            <a:r>
+              <a:rPr kumimoji="1" lang="en-US" altLang="ja-JP" sz="5400" dirty="0">
+                <a:solidFill>
+                  <a:srgbClr val="0070C0"/>
+                </a:solidFill>
+                <a:latin typeface="HGP創英角ﾎﾟｯﾌﾟ体" panose="040B0A00000000000000" pitchFamily="50" charset="-128"/>
+                <a:ea typeface="HGP創英角ﾎﾟｯﾌﾟ体" panose="040B0A00000000000000" pitchFamily="50" charset="-128"/>
+              </a:rPr>
+              <a:t>【</a:t>
+            </a:r>
+            <a:r>
+              <a:rPr kumimoji="1" lang="ja-JP" altLang="en-US" sz="5400" dirty="0">
+                <a:solidFill>
+                  <a:srgbClr val="0070C0"/>
+                </a:solidFill>
+                <a:latin typeface="HGP創英角ﾎﾟｯﾌﾟ体" panose="040B0A00000000000000" pitchFamily="50" charset="-128"/>
+                <a:ea typeface="HGP創英角ﾎﾟｯﾌﾟ体" panose="040B0A00000000000000" pitchFamily="50" charset="-128"/>
+              </a:rPr>
+              <a:t>機能一覧</a:t>
+            </a:r>
+            <a:r>
+              <a:rPr kumimoji="1" lang="en-US" altLang="ja-JP" sz="5400" dirty="0">
+                <a:solidFill>
+                  <a:srgbClr val="0070C0"/>
+                </a:solidFill>
+                <a:latin typeface="HGP創英角ﾎﾟｯﾌﾟ体" panose="040B0A00000000000000" pitchFamily="50" charset="-128"/>
+                <a:ea typeface="HGP創英角ﾎﾟｯﾌﾟ体" panose="040B0A00000000000000" pitchFamily="50" charset="-128"/>
+              </a:rPr>
+              <a:t>】</a:t>
+            </a:r>
+            <a:endParaRPr kumimoji="1" lang="ja-JP" altLang="en-US" sz="5400" dirty="0">
+              <a:solidFill>
+                <a:srgbClr val="0070C0"/>
+              </a:solidFill>
+              <a:latin typeface="HGP創英角ﾎﾟｯﾌﾟ体" panose="040B0A00000000000000" pitchFamily="50" charset="-128"/>
+              <a:ea typeface="HGP創英角ﾎﾟｯﾌﾟ体" panose="040B0A00000000000000" pitchFamily="50" charset="-128"/>
+            </a:endParaRPr>
+          </a:p>
+        </p:txBody>
+      </p:sp>
+      <p:sp>
+        <p:nvSpPr>
+          <p:cNvPr id="3" name="正方形/長方形 2">
+            <a:extLst>
+              <a:ext uri="{FF2B5EF4-FFF2-40B4-BE49-F238E27FC236}">
+                <a16:creationId xmlns:a16="http://schemas.microsoft.com/office/drawing/2014/main" id="{ED540B69-5C74-B38C-BCA7-24AEA0539F68}"/>
+              </a:ext>
+            </a:extLst>
+          </p:cNvPr>
+          <p:cNvSpPr/>
+          <p:nvPr/>
+        </p:nvSpPr>
+        <p:spPr>
+          <a:xfrm>
+            <a:off x="339048" y="698644"/>
+            <a:ext cx="11630346" cy="6159356"/>
+          </a:xfrm>
+          <a:prstGeom prst="rect">
+            <a:avLst/>
+          </a:prstGeom>
+          <a:noFill/>
+          <a:ln>
+            <a:noFill/>
+          </a:ln>
+        </p:spPr>
+        <p:style>
+          <a:lnRef idx="2">
+            <a:schemeClr val="accent1">
+              <a:shade val="15000"/>
+            </a:schemeClr>
+          </a:lnRef>
+          <a:fillRef idx="1">
+            <a:schemeClr val="accent1"/>
+          </a:fillRef>
+          <a:effectRef idx="0">
+            <a:schemeClr val="accent1"/>
+          </a:effectRef>
+          <a:fontRef idx="minor">
+            <a:schemeClr val="lt1"/>
+          </a:fontRef>
+        </p:style>
+        <p:txBody>
+          <a:bodyPr rtlCol="0" anchor="ctr"/>
+          <a:lstStyle/>
+          <a:p>
+            <a:endParaRPr kumimoji="1" lang="en-US" altLang="ja-JP" sz="2800" dirty="0">
+              <a:solidFill>
+                <a:schemeClr val="bg2"/>
+              </a:solidFill>
+              <a:latin typeface="HGP創英角ﾎﾟｯﾌﾟ体" panose="040B0A00000000000000" pitchFamily="50" charset="-128"/>
+              <a:ea typeface="HGP創英角ﾎﾟｯﾌﾟ体" panose="040B0A00000000000000" pitchFamily="50" charset="-128"/>
+            </a:endParaRPr>
+          </a:p>
+          <a:p>
+            <a:r>
+              <a:rPr kumimoji="1" lang="ja-JP" altLang="en-US" sz="2800" dirty="0">
+                <a:solidFill>
+                  <a:schemeClr val="tx1"/>
+                </a:solidFill>
+                <a:latin typeface="HGP創英角ﾎﾟｯﾌﾟ体" panose="040B0A00000000000000" pitchFamily="50" charset="-128"/>
+                <a:ea typeface="HGP創英角ﾎﾟｯﾌﾟ体" panose="040B0A00000000000000" pitchFamily="50" charset="-128"/>
+              </a:rPr>
+              <a:t>・</a:t>
+            </a:r>
+            <a:r>
+              <a:rPr kumimoji="1" lang="ja-JP" altLang="en-US" sz="2800" dirty="0">
+                <a:solidFill>
+                  <a:srgbClr val="FF0000"/>
+                </a:solidFill>
+                <a:latin typeface="HGP創英角ﾎﾟｯﾌﾟ体" panose="040B0A00000000000000" pitchFamily="50" charset="-128"/>
+                <a:ea typeface="HGP創英角ﾎﾟｯﾌﾟ体" panose="040B0A00000000000000" pitchFamily="50" charset="-128"/>
+              </a:rPr>
+              <a:t>応募情報の登録</a:t>
+            </a:r>
+            <a:r>
+              <a:rPr kumimoji="1" lang="ja-JP" altLang="en-US" sz="2400" dirty="0">
+                <a:solidFill>
+                  <a:schemeClr val="tx1"/>
+                </a:solidFill>
+                <a:latin typeface="HGP創英角ﾎﾟｯﾌﾟ体" panose="040B0A00000000000000" pitchFamily="50" charset="-128"/>
+                <a:ea typeface="HGP創英角ﾎﾟｯﾌﾟ体" panose="040B0A00000000000000" pitchFamily="50" charset="-128"/>
+              </a:rPr>
+              <a:t>（氏名・カナ・性別・生年月日・メールアドレス・電話番号・郵便番号・</a:t>
+            </a:r>
+            <a:endParaRPr kumimoji="1" lang="en-US" altLang="ja-JP" sz="2400" dirty="0">
+              <a:solidFill>
+                <a:schemeClr val="tx1"/>
+              </a:solidFill>
+              <a:latin typeface="HGP創英角ﾎﾟｯﾌﾟ体" panose="040B0A00000000000000" pitchFamily="50" charset="-128"/>
+              <a:ea typeface="HGP創英角ﾎﾟｯﾌﾟ体" panose="040B0A00000000000000" pitchFamily="50" charset="-128"/>
+            </a:endParaRPr>
+          </a:p>
+          <a:p>
+            <a:r>
+              <a:rPr kumimoji="1" lang="ja-JP" altLang="en-US" sz="2400" dirty="0">
+                <a:solidFill>
+                  <a:schemeClr val="tx1"/>
+                </a:solidFill>
+                <a:latin typeface="HGP創英角ﾎﾟｯﾌﾟ体" panose="040B0A00000000000000" pitchFamily="50" charset="-128"/>
+                <a:ea typeface="HGP創英角ﾎﾟｯﾌﾟ体" panose="040B0A00000000000000" pitchFamily="50" charset="-128"/>
+              </a:rPr>
+              <a:t>　　　　　　　　　　　　　　　　　　　　　　　　　　　　　　　　　　　　　住所・最終学歴・希望勤務地）</a:t>
+            </a:r>
+            <a:endParaRPr kumimoji="1" lang="en-US" altLang="ja-JP" sz="2400" dirty="0">
+              <a:solidFill>
+                <a:schemeClr val="tx1"/>
+              </a:solidFill>
+              <a:latin typeface="HGP創英角ﾎﾟｯﾌﾟ体" panose="040B0A00000000000000" pitchFamily="50" charset="-128"/>
+              <a:ea typeface="HGP創英角ﾎﾟｯﾌﾟ体" panose="040B0A00000000000000" pitchFamily="50" charset="-128"/>
+            </a:endParaRPr>
+          </a:p>
+          <a:p>
+            <a:r>
+              <a:rPr kumimoji="1" lang="ja-JP" altLang="en-US" sz="2800" dirty="0">
+                <a:solidFill>
+                  <a:schemeClr val="tx1"/>
+                </a:solidFill>
+                <a:latin typeface="HGP創英角ﾎﾟｯﾌﾟ体" panose="040B0A00000000000000" pitchFamily="50" charset="-128"/>
+                <a:ea typeface="HGP創英角ﾎﾟｯﾌﾟ体" panose="040B0A00000000000000" pitchFamily="50" charset="-128"/>
+              </a:rPr>
+              <a:t>→これらのデータベースへの登録</a:t>
+            </a:r>
+            <a:endParaRPr kumimoji="1" lang="en-US" altLang="ja-JP" sz="2800" dirty="0">
+              <a:solidFill>
+                <a:schemeClr val="tx1"/>
+              </a:solidFill>
+              <a:latin typeface="HGP創英角ﾎﾟｯﾌﾟ体" panose="040B0A00000000000000" pitchFamily="50" charset="-128"/>
+              <a:ea typeface="HGP創英角ﾎﾟｯﾌﾟ体" panose="040B0A00000000000000" pitchFamily="50" charset="-128"/>
+            </a:endParaRPr>
+          </a:p>
+          <a:p>
+            <a:endParaRPr kumimoji="1" lang="en-US" altLang="ja-JP" sz="2800" dirty="0">
+              <a:solidFill>
+                <a:schemeClr val="tx1"/>
+              </a:solidFill>
+              <a:latin typeface="HGP創英角ﾎﾟｯﾌﾟ体" panose="040B0A00000000000000" pitchFamily="50" charset="-128"/>
+              <a:ea typeface="HGP創英角ﾎﾟｯﾌﾟ体" panose="040B0A00000000000000" pitchFamily="50" charset="-128"/>
+            </a:endParaRPr>
+          </a:p>
+          <a:p>
+            <a:r>
+              <a:rPr kumimoji="1" lang="ja-JP" altLang="en-US" sz="2800" dirty="0">
+                <a:solidFill>
+                  <a:schemeClr val="tx1"/>
+                </a:solidFill>
+                <a:latin typeface="HGP創英角ﾎﾟｯﾌﾟ体" panose="040B0A00000000000000" pitchFamily="50" charset="-128"/>
+                <a:ea typeface="HGP創英角ﾎﾟｯﾌﾟ体" panose="040B0A00000000000000" pitchFamily="50" charset="-128"/>
+              </a:rPr>
+              <a:t>・</a:t>
+            </a:r>
+            <a:r>
+              <a:rPr kumimoji="1" lang="ja-JP" altLang="en-US" sz="2800" dirty="0">
+                <a:solidFill>
+                  <a:srgbClr val="FF0000"/>
+                </a:solidFill>
+                <a:latin typeface="HGP創英角ﾎﾟｯﾌﾟ体" panose="040B0A00000000000000" pitchFamily="50" charset="-128"/>
+                <a:ea typeface="HGP創英角ﾎﾟｯﾌﾟ体" panose="040B0A00000000000000" pitchFamily="50" charset="-128"/>
+              </a:rPr>
+              <a:t>応募者情報を検索</a:t>
+            </a:r>
+            <a:r>
+              <a:rPr kumimoji="1" lang="ja-JP" altLang="en-US" sz="2400" dirty="0">
+                <a:solidFill>
+                  <a:schemeClr val="tx1"/>
+                </a:solidFill>
+                <a:latin typeface="HGP創英角ﾎﾟｯﾌﾟ体" panose="040B0A00000000000000" pitchFamily="50" charset="-128"/>
+                <a:ea typeface="HGP創英角ﾎﾟｯﾌﾟ体" panose="040B0A00000000000000" pitchFamily="50" charset="-128"/>
+              </a:rPr>
+              <a:t>（氏名・カナ・性別・メールアドレス・面接予定日・選考状況・</a:t>
+            </a:r>
+            <a:endParaRPr kumimoji="1" lang="en-US" altLang="ja-JP" sz="2400" dirty="0">
+              <a:solidFill>
+                <a:schemeClr val="tx1"/>
+              </a:solidFill>
+              <a:latin typeface="HGP創英角ﾎﾟｯﾌﾟ体" panose="040B0A00000000000000" pitchFamily="50" charset="-128"/>
+              <a:ea typeface="HGP創英角ﾎﾟｯﾌﾟ体" panose="040B0A00000000000000" pitchFamily="50" charset="-128"/>
+            </a:endParaRPr>
+          </a:p>
+          <a:p>
+            <a:r>
+              <a:rPr kumimoji="1" lang="ja-JP" altLang="en-US" sz="2400" dirty="0">
+                <a:solidFill>
+                  <a:schemeClr val="tx1"/>
+                </a:solidFill>
+                <a:latin typeface="HGP創英角ﾎﾟｯﾌﾟ体" panose="040B0A00000000000000" pitchFamily="50" charset="-128"/>
+                <a:ea typeface="HGP創英角ﾎﾟｯﾌﾟ体" panose="040B0A00000000000000" pitchFamily="50" charset="-128"/>
+              </a:rPr>
+              <a:t>　　　　　　　　　　　　　　　　　　　　　　　　　　　　　　　　　　　　　　　　　　　　　　 担当者・合否）</a:t>
+            </a:r>
+            <a:endParaRPr kumimoji="1" lang="en-US" altLang="ja-JP" sz="2800" dirty="0">
+              <a:solidFill>
+                <a:schemeClr val="tx1"/>
+              </a:solidFill>
+              <a:latin typeface="HGP創英角ﾎﾟｯﾌﾟ体" panose="040B0A00000000000000" pitchFamily="50" charset="-128"/>
+              <a:ea typeface="HGP創英角ﾎﾟｯﾌﾟ体" panose="040B0A00000000000000" pitchFamily="50" charset="-128"/>
+            </a:endParaRPr>
+          </a:p>
+          <a:p>
+            <a:endParaRPr kumimoji="1" lang="en-US" altLang="ja-JP" sz="2800" dirty="0">
+              <a:solidFill>
+                <a:schemeClr val="bg2"/>
+              </a:solidFill>
+              <a:latin typeface="HGP創英角ﾎﾟｯﾌﾟ体" panose="040B0A00000000000000" pitchFamily="50" charset="-128"/>
+              <a:ea typeface="HGP創英角ﾎﾟｯﾌﾟ体" panose="040B0A00000000000000" pitchFamily="50" charset="-128"/>
+            </a:endParaRPr>
+          </a:p>
+          <a:p>
+            <a:r>
+              <a:rPr kumimoji="1" lang="ja-JP" altLang="en-US" sz="2800" dirty="0">
+                <a:solidFill>
+                  <a:schemeClr val="tx1"/>
+                </a:solidFill>
+                <a:latin typeface="HGP創英角ﾎﾟｯﾌﾟ体" panose="040B0A00000000000000" pitchFamily="50" charset="-128"/>
+                <a:ea typeface="HGP創英角ﾎﾟｯﾌﾟ体" panose="040B0A00000000000000" pitchFamily="50" charset="-128"/>
+              </a:rPr>
+              <a:t>・</a:t>
+            </a:r>
+            <a:r>
+              <a:rPr kumimoji="1" lang="ja-JP" altLang="en-US" sz="2800" dirty="0">
+                <a:solidFill>
+                  <a:srgbClr val="FF0000"/>
+                </a:solidFill>
+                <a:latin typeface="HGP創英角ﾎﾟｯﾌﾟ体" panose="040B0A00000000000000" pitchFamily="50" charset="-128"/>
+                <a:ea typeface="HGP創英角ﾎﾟｯﾌﾟ体" panose="040B0A00000000000000" pitchFamily="50" charset="-128"/>
+              </a:rPr>
+              <a:t>応募者情報を一覧表示</a:t>
+            </a:r>
+            <a:r>
+              <a:rPr kumimoji="1" lang="ja-JP" altLang="en-US" sz="2400" dirty="0">
+                <a:solidFill>
+                  <a:schemeClr val="tx1"/>
+                </a:solidFill>
+                <a:latin typeface="HGP創英角ﾎﾟｯﾌﾟ体" panose="040B0A00000000000000" pitchFamily="50" charset="-128"/>
+                <a:ea typeface="HGP創英角ﾎﾟｯﾌﾟ体" panose="040B0A00000000000000" pitchFamily="50" charset="-128"/>
+              </a:rPr>
+              <a:t>（応募者</a:t>
+            </a:r>
+            <a:r>
+              <a:rPr kumimoji="1" lang="en-US" altLang="ja-JP" sz="2400" dirty="0">
+                <a:solidFill>
+                  <a:schemeClr val="tx1"/>
+                </a:solidFill>
+                <a:latin typeface="HGP創英角ﾎﾟｯﾌﾟ体" panose="040B0A00000000000000" pitchFamily="50" charset="-128"/>
+                <a:ea typeface="HGP創英角ﾎﾟｯﾌﾟ体" panose="040B0A00000000000000" pitchFamily="50" charset="-128"/>
+              </a:rPr>
+              <a:t>ID</a:t>
+            </a:r>
+            <a:r>
+              <a:rPr kumimoji="1" lang="ja-JP" altLang="en-US" sz="2400" dirty="0">
+                <a:solidFill>
+                  <a:schemeClr val="tx1"/>
+                </a:solidFill>
+                <a:latin typeface="HGP創英角ﾎﾟｯﾌﾟ体" panose="040B0A00000000000000" pitchFamily="50" charset="-128"/>
+                <a:ea typeface="HGP創英角ﾎﾟｯﾌﾟ体" panose="040B0A00000000000000" pitchFamily="50" charset="-128"/>
+              </a:rPr>
+              <a:t>・氏名・カナ・性別・メールアドレス・電話番号・</a:t>
+            </a:r>
+            <a:endParaRPr kumimoji="1" lang="en-US" altLang="ja-JP" sz="2400" dirty="0">
+              <a:solidFill>
+                <a:schemeClr val="tx1"/>
+              </a:solidFill>
+              <a:latin typeface="HGP創英角ﾎﾟｯﾌﾟ体" panose="040B0A00000000000000" pitchFamily="50" charset="-128"/>
+              <a:ea typeface="HGP創英角ﾎﾟｯﾌﾟ体" panose="040B0A00000000000000" pitchFamily="50" charset="-128"/>
+            </a:endParaRPr>
+          </a:p>
+          <a:p>
+            <a:r>
+              <a:rPr kumimoji="1" lang="ja-JP" altLang="en-US" sz="2400" dirty="0">
+                <a:solidFill>
+                  <a:schemeClr val="tx1"/>
+                </a:solidFill>
+                <a:latin typeface="HGP創英角ﾎﾟｯﾌﾟ体" panose="040B0A00000000000000" pitchFamily="50" charset="-128"/>
+                <a:ea typeface="HGP創英角ﾎﾟｯﾌﾟ体" panose="040B0A00000000000000" pitchFamily="50" charset="-128"/>
+              </a:rPr>
+              <a:t>　　　　　　　　　　　　　　　　応募日・面接予定日・選考状況・更新日時・担当者・更新ボタン）</a:t>
+            </a:r>
+            <a:endParaRPr kumimoji="1" lang="en-US" altLang="ja-JP" sz="2400" dirty="0">
+              <a:solidFill>
+                <a:schemeClr val="tx1"/>
+              </a:solidFill>
+              <a:latin typeface="HGP創英角ﾎﾟｯﾌﾟ体" panose="040B0A00000000000000" pitchFamily="50" charset="-128"/>
+              <a:ea typeface="HGP創英角ﾎﾟｯﾌﾟ体" panose="040B0A00000000000000" pitchFamily="50" charset="-128"/>
+            </a:endParaRPr>
+          </a:p>
+          <a:p>
+            <a:r>
+              <a:rPr kumimoji="1" lang="ja-JP" altLang="en-US" sz="2800" dirty="0">
+                <a:solidFill>
+                  <a:schemeClr val="tx1"/>
+                </a:solidFill>
+                <a:latin typeface="HGP創英角ﾎﾟｯﾌﾟ体" panose="040B0A00000000000000" pitchFamily="50" charset="-128"/>
+                <a:ea typeface="HGP創英角ﾎﾟｯﾌﾟ体" panose="040B0A00000000000000" pitchFamily="50" charset="-128"/>
+              </a:rPr>
+              <a:t>→更新ボタンより変更・登録が可能</a:t>
+            </a:r>
+            <a:endParaRPr kumimoji="1" lang="en-US" altLang="ja-JP" sz="2800" dirty="0">
+              <a:solidFill>
+                <a:schemeClr val="tx1"/>
+              </a:solidFill>
+              <a:latin typeface="HGP創英角ﾎﾟｯﾌﾟ体" panose="040B0A00000000000000" pitchFamily="50" charset="-128"/>
+              <a:ea typeface="HGP創英角ﾎﾟｯﾌﾟ体" panose="040B0A00000000000000" pitchFamily="50" charset="-128"/>
+            </a:endParaRPr>
+          </a:p>
+          <a:p>
+            <a:endParaRPr kumimoji="1" lang="en-US" altLang="ja-JP" sz="2800" dirty="0">
+              <a:solidFill>
+                <a:schemeClr val="tx1"/>
+              </a:solidFill>
+              <a:latin typeface="HGP創英角ﾎﾟｯﾌﾟ体" panose="040B0A00000000000000" pitchFamily="50" charset="-128"/>
+              <a:ea typeface="HGP創英角ﾎﾟｯﾌﾟ体" panose="040B0A00000000000000" pitchFamily="50" charset="-128"/>
+            </a:endParaRPr>
+          </a:p>
+          <a:p>
+            <a:r>
+              <a:rPr kumimoji="1" lang="ja-JP" altLang="en-US" sz="2800" dirty="0">
+                <a:solidFill>
+                  <a:schemeClr val="tx1"/>
+                </a:solidFill>
+                <a:latin typeface="HGP創英角ﾎﾟｯﾌﾟ体" panose="040B0A00000000000000" pitchFamily="50" charset="-128"/>
+                <a:ea typeface="HGP創英角ﾎﾟｯﾌﾟ体" panose="040B0A00000000000000" pitchFamily="50" charset="-128"/>
+              </a:rPr>
+              <a:t>・</a:t>
+            </a:r>
+            <a:r>
+              <a:rPr kumimoji="1" lang="ja-JP" altLang="en-US" sz="2800" dirty="0">
+                <a:solidFill>
+                  <a:srgbClr val="FF0000"/>
+                </a:solidFill>
+                <a:latin typeface="HGP創英角ﾎﾟｯﾌﾟ体" panose="040B0A00000000000000" pitchFamily="50" charset="-128"/>
+                <a:ea typeface="HGP創英角ﾎﾟｯﾌﾟ体" panose="040B0A00000000000000" pitchFamily="50" charset="-128"/>
+              </a:rPr>
+              <a:t>採用スケジュールカレンダーへ自動反映</a:t>
+            </a:r>
+            <a:endParaRPr kumimoji="1" lang="en-US" altLang="ja-JP" sz="2800" dirty="0">
+              <a:solidFill>
+                <a:srgbClr val="FF0000"/>
+              </a:solidFill>
+              <a:latin typeface="HGP創英角ﾎﾟｯﾌﾟ体" panose="040B0A00000000000000" pitchFamily="50" charset="-128"/>
+              <a:ea typeface="HGP創英角ﾎﾟｯﾌﾟ体" panose="040B0A00000000000000" pitchFamily="50" charset="-128"/>
+            </a:endParaRPr>
+          </a:p>
+        </p:txBody>
+      </p:sp>
+    </p:spTree>
+    <p:extLst>
+      <p:ext uri="{BB962C8B-B14F-4D97-AF65-F5344CB8AC3E}">
+        <p14:creationId xmlns:p14="http://schemas.microsoft.com/office/powerpoint/2010/main" val="3041262461"/>
+      </p:ext>
+    </p:extLst>
+  </p:cSld>
+  <p:clrMapOvr>
+    <a:masterClrMapping/>
+  </p:clrMapOvr>
+</p:sld>
+</file>
+
+<file path=ppt/slides/slide7.xml><?xml version="1.0" encoding="utf-8"?>
+<p:sld xmlns:a="http://schemas.openxmlformats.org/drawingml/2006/main" xmlns:r="http://schemas.openxmlformats.org/officeDocument/2006/relationships" xmlns:p="http://schemas.openxmlformats.org/presentationml/2006/main">
+  <p:cSld>
+    <p:bg>
+      <p:bgPr>
+        <a:solidFill>
           <a:schemeClr val="tx1"/>
         </a:solidFill>
         <a:effectLst/>

--- a/採用管理システム.pptx
+++ b/採用管理システム.pptx
@@ -13160,9 +13160,49 @@
                 <a:latin typeface="HGP創英角ﾎﾟｯﾌﾟ体" panose="040B0A00000000000000" pitchFamily="50" charset="-128"/>
                 <a:ea typeface="HGP創英角ﾎﾟｯﾌﾟ体" panose="040B0A00000000000000" pitchFamily="50" charset="-128"/>
               </a:rPr>
-              <a:t>→これらのデータベースへの登録</a:t>
-            </a:r>
-            <a:endParaRPr kumimoji="1" lang="en-US" altLang="ja-JP" sz="2800" dirty="0">
+              <a:t>→これらのデータベースへの登録　</a:t>
+            </a:r>
+            <a:r>
+              <a:rPr kumimoji="1" lang="en-US" altLang="ja-JP" sz="1700" u="sng" dirty="0">
+                <a:solidFill>
+                  <a:schemeClr val="tx1"/>
+                </a:solidFill>
+                <a:latin typeface="HGP創英角ﾎﾟｯﾌﾟ体" panose="040B0A00000000000000" pitchFamily="50" charset="-128"/>
+                <a:ea typeface="HGP創英角ﾎﾟｯﾌﾟ体" panose="040B0A00000000000000" pitchFamily="50" charset="-128"/>
+              </a:rPr>
+              <a:t>※</a:t>
+            </a:r>
+            <a:r>
+              <a:rPr kumimoji="1" lang="ja-JP" altLang="en-US" sz="1700" u="sng" dirty="0">
+                <a:solidFill>
+                  <a:schemeClr val="tx1"/>
+                </a:solidFill>
+                <a:latin typeface="HGP創英角ﾎﾟｯﾌﾟ体" panose="040B0A00000000000000" pitchFamily="50" charset="-128"/>
+                <a:ea typeface="HGP創英角ﾎﾟｯﾌﾟ体" panose="040B0A00000000000000" pitchFamily="50" charset="-128"/>
+              </a:rPr>
+              <a:t>応募日時・更新日時・削除フラグは</a:t>
+            </a:r>
+            <a:r>
+              <a:rPr kumimoji="1" lang="en-US" altLang="ja-JP" sz="1700" u="sng" dirty="0">
+                <a:solidFill>
+                  <a:schemeClr val="tx1"/>
+                </a:solidFill>
+                <a:latin typeface="HGP創英角ﾎﾟｯﾌﾟ体" panose="040B0A00000000000000" pitchFamily="50" charset="-128"/>
+                <a:ea typeface="HGP創英角ﾎﾟｯﾌﾟ体" panose="040B0A00000000000000" pitchFamily="50" charset="-128"/>
+              </a:rPr>
+              <a:t>DB</a:t>
+            </a:r>
+            <a:r>
+              <a:rPr kumimoji="1" lang="ja-JP" altLang="en-US" sz="1700" u="sng" dirty="0">
+                <a:solidFill>
+                  <a:schemeClr val="tx1"/>
+                </a:solidFill>
+                <a:latin typeface="HGP創英角ﾎﾟｯﾌﾟ体" panose="040B0A00000000000000" pitchFamily="50" charset="-128"/>
+                <a:ea typeface="HGP創英角ﾎﾟｯﾌﾟ体" panose="040B0A00000000000000" pitchFamily="50" charset="-128"/>
+              </a:rPr>
+              <a:t>登録時に自動反映</a:t>
+            </a:r>
+            <a:endParaRPr kumimoji="1" lang="en-US" altLang="ja-JP" sz="1700" u="sng" dirty="0">
               <a:solidFill>
                 <a:schemeClr val="tx1"/>
               </a:solidFill>
